--- a/public/lessons/year-6-maths/spring/week-15/solve-decimal-problems/teaching-powerpoint-v1.pptx
+++ b/public/lessons/year-6-maths/spring/week-15/solve-decimal-problems/teaching-powerpoint-v1.pptx
@@ -2,24 +2,24 @@
 <file path=ppt/presentation.xml><?xml version="1.0" encoding="utf-8"?>
 <p:presentation xmlns:p="http://schemas.openxmlformats.org/presentationml/2006/main">
   <p:sldMasterIdLst>
-    <p:sldMasterId xmlns:r="http://schemas.openxmlformats.org/officeDocument/2006/relationships" id="2147483648" r:id="R5f581b98926c46f8"/>
+    <p:sldMasterId xmlns:r="http://schemas.openxmlformats.org/officeDocument/2006/relationships" id="2147483648" r:id="Rf813d018ee634ff8"/>
   </p:sldMasterIdLst>
   <p:notesMasterIdLst>
-    <p:notesMasterId xmlns:r="http://schemas.openxmlformats.org/officeDocument/2006/relationships" r:id="Rd9ad4716c2224ab7"/>
+    <p:notesMasterId xmlns:r="http://schemas.openxmlformats.org/officeDocument/2006/relationships" r:id="R690da3e2d4f54232"/>
   </p:notesMasterIdLst>
   <p:sldIdLst>
-    <p:sldId xmlns:r="http://schemas.openxmlformats.org/officeDocument/2006/relationships" id="256" r:id="R65a440d221ea40aa"/>
-    <p:sldId xmlns:r="http://schemas.openxmlformats.org/officeDocument/2006/relationships" id="257" r:id="Rb0c55dd81a154911"/>
-    <p:sldId xmlns:r="http://schemas.openxmlformats.org/officeDocument/2006/relationships" id="258" r:id="R5143e32bd12348cc"/>
-    <p:sldId xmlns:r="http://schemas.openxmlformats.org/officeDocument/2006/relationships" id="259" r:id="R1e3ca52118194fc5"/>
-    <p:sldId xmlns:r="http://schemas.openxmlformats.org/officeDocument/2006/relationships" id="260" r:id="R3b1a1a63b1fd4ef7"/>
-    <p:sldId xmlns:r="http://schemas.openxmlformats.org/officeDocument/2006/relationships" id="261" r:id="Rf85552092835426e"/>
-    <p:sldId xmlns:r="http://schemas.openxmlformats.org/officeDocument/2006/relationships" id="262" r:id="R2ac740bac53549d2"/>
-    <p:sldId xmlns:r="http://schemas.openxmlformats.org/officeDocument/2006/relationships" id="263" r:id="R6499d401f4a54f84"/>
-    <p:sldId xmlns:r="http://schemas.openxmlformats.org/officeDocument/2006/relationships" id="264" r:id="R919da72e6ff7416e"/>
-    <p:sldId xmlns:r="http://schemas.openxmlformats.org/officeDocument/2006/relationships" id="265" r:id="Re4a1db1e54d5451e"/>
-    <p:sldId xmlns:r="http://schemas.openxmlformats.org/officeDocument/2006/relationships" id="266" r:id="R2f5a0b3e5c8145b9"/>
-    <p:sldId xmlns:r="http://schemas.openxmlformats.org/officeDocument/2006/relationships" id="267" r:id="Raf79b867af4f43b5"/>
+    <p:sldId xmlns:r="http://schemas.openxmlformats.org/officeDocument/2006/relationships" id="256" r:id="R3c7a1e58bf92407f"/>
+    <p:sldId xmlns:r="http://schemas.openxmlformats.org/officeDocument/2006/relationships" id="257" r:id="Rb80aaaef09144a93"/>
+    <p:sldId xmlns:r="http://schemas.openxmlformats.org/officeDocument/2006/relationships" id="258" r:id="R9f911aa0ae7f403b"/>
+    <p:sldId xmlns:r="http://schemas.openxmlformats.org/officeDocument/2006/relationships" id="259" r:id="R9e60539899804d76"/>
+    <p:sldId xmlns:r="http://schemas.openxmlformats.org/officeDocument/2006/relationships" id="260" r:id="R9637f2ab4ac54671"/>
+    <p:sldId xmlns:r="http://schemas.openxmlformats.org/officeDocument/2006/relationships" id="261" r:id="Rdcb46b38c1744ac4"/>
+    <p:sldId xmlns:r="http://schemas.openxmlformats.org/officeDocument/2006/relationships" id="262" r:id="R3c4d189dcbd64766"/>
+    <p:sldId xmlns:r="http://schemas.openxmlformats.org/officeDocument/2006/relationships" id="263" r:id="R417985cf415b45a2"/>
+    <p:sldId xmlns:r="http://schemas.openxmlformats.org/officeDocument/2006/relationships" id="264" r:id="R9fca2c12ad354f4a"/>
+    <p:sldId xmlns:r="http://schemas.openxmlformats.org/officeDocument/2006/relationships" id="265" r:id="R0e0a8403c6174995"/>
+    <p:sldId xmlns:r="http://schemas.openxmlformats.org/officeDocument/2006/relationships" id="266" r:id="R4213255359694f8f"/>
+    <p:sldId xmlns:r="http://schemas.openxmlformats.org/officeDocument/2006/relationships" id="267" r:id="R8b60ba3253c249ca"/>
   </p:sldIdLst>
   <p:sldSz cx="12192000" cy="6858000"/>
   <p:notesSz cx="6858000" cy="9144000"/>
@@ -873,7 +873,7 @@
           <a:lstStyle xmlns:a="http://schemas.openxmlformats.org/drawingml/2006/main"/>
           <a:p xmlns:a="http://schemas.openxmlformats.org/drawingml/2006/main">
             <a:r>
-              <a:t>I do. Reveal the question, setup and each calculation stage one click at a time. Pupils watch before copying. Model answer: 8.975 km.</a:t>
+              <a:t>I do. Reveal the question, then reveal each mathematical change one click at a time. Point to the numbers and operation that changed before moving to the next line. Final answer: 8.975 km.</a:t>
             </a:r>
           </a:p>
         </p:txBody>
@@ -1291,7 +1291,7 @@
   </p:cSld>
   <p:clrMap bg1="lt1" tx1="dk1" bg2="lt2" tx2="dk2" accent1="accent1" accent2="accent2" accent3="accent3" accent4="accent4" accent5="accent5" accent6="accent6" hlink="hlink" folHlink="folHlink"/>
   <p:sldLayoutIdLst>
-    <p:sldLayoutId xmlns:r="http://schemas.openxmlformats.org/officeDocument/2006/relationships" id="2147483649" r:id="Redf8d88d9af24678"/>
+    <p:sldLayoutId xmlns:r="http://schemas.openxmlformats.org/officeDocument/2006/relationships" id="2147483649" r:id="R699c1d6d5cab43d6"/>
   </p:sldLayoutIdLst>
   <p:txStyles>
     <p:titleStyle>
@@ -1842,7 +1842,7 @@
           <p:cNvPr id="12" name="">
             <a:extLst xmlns:a="http://schemas.openxmlformats.org/drawingml/2006/main">
               <a:ext uri="{FF2B5EF4-FFF2-40B4-BE49-F238E27FC236}">
-                <a16:creationId xmlns:a16="http://schemas.microsoft.com/office/drawing/2014/main" id="{0F7B3970-0FB8-4242-9AF3-3AF985FB0777}"/>
+                <a16:creationId xmlns:a16="http://schemas.microsoft.com/office/drawing/2014/main" id="{CF0E109C-EFA2-4B7E-ACCB-84DC84FA9C2A}"/>
               </a:ext>
             </a:extLst>
           </p:cNvPr>
@@ -1874,7 +1874,7 @@
           <p:cNvPr id="2" name="">
             <a:extLst xmlns:a="http://schemas.openxmlformats.org/drawingml/2006/main">
               <a:ext uri="{FF2B5EF4-FFF2-40B4-BE49-F238E27FC236}">
-                <a16:creationId xmlns:a16="http://schemas.microsoft.com/office/drawing/2014/main" id="{106FE82E-BB24-47BA-9620-8737C1536100}"/>
+                <a16:creationId xmlns:a16="http://schemas.microsoft.com/office/drawing/2014/main" id="{DD18A38A-CE10-42D2-A635-0EBE2C947B41}"/>
               </a:ext>
             </a:extLst>
           </p:cNvPr>
@@ -1931,7 +1931,7 @@
           <p:cNvPr id="3" name="">
             <a:extLst xmlns:a="http://schemas.openxmlformats.org/drawingml/2006/main">
               <a:ext uri="{FF2B5EF4-FFF2-40B4-BE49-F238E27FC236}">
-                <a16:creationId xmlns:a16="http://schemas.microsoft.com/office/drawing/2014/main" id="{8C2658B6-7072-441B-8EE3-58BC66DC7CB8}"/>
+                <a16:creationId xmlns:a16="http://schemas.microsoft.com/office/drawing/2014/main" id="{5DF3E854-7DC4-4231-AD5E-84C166B7B51E}"/>
               </a:ext>
             </a:extLst>
           </p:cNvPr>
@@ -1965,7 +1965,7 @@
           <p:cNvPr id="4" name="">
             <a:extLst xmlns:a="http://schemas.openxmlformats.org/drawingml/2006/main">
               <a:ext uri="{FF2B5EF4-FFF2-40B4-BE49-F238E27FC236}">
-                <a16:creationId xmlns:a16="http://schemas.microsoft.com/office/drawing/2014/main" id="{CD6785B3-2F94-4C74-81E5-8F8FE914F746}"/>
+                <a16:creationId xmlns:a16="http://schemas.microsoft.com/office/drawing/2014/main" id="{DCDADD7F-5BF2-4E95-B90A-02E2A9A36AFD}"/>
               </a:ext>
             </a:extLst>
           </p:cNvPr>
@@ -2022,7 +2022,7 @@
           <p:cNvPr id="5" name="">
             <a:extLst xmlns:a="http://schemas.openxmlformats.org/drawingml/2006/main">
               <a:ext uri="{FF2B5EF4-FFF2-40B4-BE49-F238E27FC236}">
-                <a16:creationId xmlns:a16="http://schemas.microsoft.com/office/drawing/2014/main" id="{1B583FB3-94C1-432C-A48E-5F82C54B6240}"/>
+                <a16:creationId xmlns:a16="http://schemas.microsoft.com/office/drawing/2014/main" id="{3DE6450F-9F4A-41CD-B844-4C5FF09295E1}"/>
               </a:ext>
             </a:extLst>
           </p:cNvPr>
@@ -2079,7 +2079,7 @@
           <p:cNvPr id="6" name="">
             <a:extLst xmlns:a="http://schemas.openxmlformats.org/drawingml/2006/main">
               <a:ext uri="{FF2B5EF4-FFF2-40B4-BE49-F238E27FC236}">
-                <a16:creationId xmlns:a16="http://schemas.microsoft.com/office/drawing/2014/main" id="{3CBCC19F-70D0-4EE5-AF71-57B7AA534B74}"/>
+                <a16:creationId xmlns:a16="http://schemas.microsoft.com/office/drawing/2014/main" id="{131FA29D-BB17-4C95-B0D8-1E0734A9E38D}"/>
               </a:ext>
             </a:extLst>
           </p:cNvPr>
@@ -2113,7 +2113,7 @@
           <p:cNvPr id="7" name="">
             <a:extLst xmlns:a="http://schemas.openxmlformats.org/drawingml/2006/main">
               <a:ext uri="{FF2B5EF4-FFF2-40B4-BE49-F238E27FC236}">
-                <a16:creationId xmlns:a16="http://schemas.microsoft.com/office/drawing/2014/main" id="{C227408D-53CE-40A6-9219-9D32F05E5DC2}"/>
+                <a16:creationId xmlns:a16="http://schemas.microsoft.com/office/drawing/2014/main" id="{F36C536F-494F-40A3-A934-291814CFD4DB}"/>
               </a:ext>
             </a:extLst>
           </p:cNvPr>
@@ -2170,7 +2170,7 @@
           <p:cNvPr id="8" name="">
             <a:extLst xmlns:a="http://schemas.openxmlformats.org/drawingml/2006/main">
               <a:ext uri="{FF2B5EF4-FFF2-40B4-BE49-F238E27FC236}">
-                <a16:creationId xmlns:a16="http://schemas.microsoft.com/office/drawing/2014/main" id="{C384DC10-40E8-4050-98AF-41B7089640AF}"/>
+                <a16:creationId xmlns:a16="http://schemas.microsoft.com/office/drawing/2014/main" id="{A00B218B-0E89-4D9C-A100-7F962425599E}"/>
               </a:ext>
             </a:extLst>
           </p:cNvPr>
@@ -2227,7 +2227,7 @@
           <p:cNvPr id="9" name="">
             <a:extLst xmlns:a="http://schemas.openxmlformats.org/drawingml/2006/main">
               <a:ext uri="{FF2B5EF4-FFF2-40B4-BE49-F238E27FC236}">
-                <a16:creationId xmlns:a16="http://schemas.microsoft.com/office/drawing/2014/main" id="{3BB5B2CB-FD66-4178-85F1-0F4635B5802B}"/>
+                <a16:creationId xmlns:a16="http://schemas.microsoft.com/office/drawing/2014/main" id="{1EDC9A1B-0310-48D1-B3F0-87B222D832C2}"/>
               </a:ext>
             </a:extLst>
           </p:cNvPr>
@@ -2284,7 +2284,7 @@
           <p:cNvPr id="10" name="">
             <a:extLst xmlns:a="http://schemas.openxmlformats.org/drawingml/2006/main">
               <a:ext uri="{FF2B5EF4-FFF2-40B4-BE49-F238E27FC236}">
-                <a16:creationId xmlns:a16="http://schemas.microsoft.com/office/drawing/2014/main" id="{CB1E6508-D2C8-481A-A917-8068AA912FA4}"/>
+                <a16:creationId xmlns:a16="http://schemas.microsoft.com/office/drawing/2014/main" id="{19BFDAA0-E9E7-46FB-9C05-93C532B336F3}"/>
               </a:ext>
             </a:extLst>
           </p:cNvPr>
@@ -2341,7 +2341,7 @@
           <p:cNvPr id="11" name="">
             <a:extLst xmlns:a="http://schemas.openxmlformats.org/drawingml/2006/main">
               <a:ext uri="{FF2B5EF4-FFF2-40B4-BE49-F238E27FC236}">
-                <a16:creationId xmlns:a16="http://schemas.microsoft.com/office/drawing/2014/main" id="{AD08D6A4-5A4A-4C8C-A525-59819816F74B}"/>
+                <a16:creationId xmlns:a16="http://schemas.microsoft.com/office/drawing/2014/main" id="{F0C599A1-52EC-48B7-9222-60F5AC93D7BC}"/>
               </a:ext>
             </a:extLst>
           </p:cNvPr>
@@ -2396,7 +2396,7 @@
     </p:spTree>
     <p:extLst>
       <p:ext uri="{BB962C8B-B14F-4D97-AF65-F5344CB8AC3E}">
-        <p14:creationId xmlns:p14="http://schemas.microsoft.com/office/powerpoint/2010/main" val="827144257"/>
+        <p14:creationId xmlns:p14="http://schemas.microsoft.com/office/powerpoint/2010/main" val="1353874096"/>
       </p:ext>
     </p:extLst>
   </p:cSld>
@@ -2427,7 +2427,7 @@
           <p:cNvPr id="14" name="">
             <a:extLst xmlns:a="http://schemas.openxmlformats.org/drawingml/2006/main">
               <a:ext uri="{FF2B5EF4-FFF2-40B4-BE49-F238E27FC236}">
-                <a16:creationId xmlns:a16="http://schemas.microsoft.com/office/drawing/2014/main" id="{6FF1BA4B-1718-4681-B875-44A5B54ED428}"/>
+                <a16:creationId xmlns:a16="http://schemas.microsoft.com/office/drawing/2014/main" id="{E3FD1A00-71A9-43B5-9018-0DE83FB67DDD}"/>
               </a:ext>
             </a:extLst>
           </p:cNvPr>
@@ -2459,7 +2459,7 @@
           <p:cNvPr id="2" name="">
             <a:extLst xmlns:a="http://schemas.openxmlformats.org/drawingml/2006/main">
               <a:ext uri="{FF2B5EF4-FFF2-40B4-BE49-F238E27FC236}">
-                <a16:creationId xmlns:a16="http://schemas.microsoft.com/office/drawing/2014/main" id="{6A46DA0E-18FA-45ED-8404-50F9BCE505A0}"/>
+                <a16:creationId xmlns:a16="http://schemas.microsoft.com/office/drawing/2014/main" id="{51275083-6C5C-40DE-B5DD-C21ABF1817C0}"/>
               </a:ext>
             </a:extLst>
           </p:cNvPr>
@@ -2516,7 +2516,7 @@
           <p:cNvPr id="3" name="">
             <a:extLst xmlns:a="http://schemas.openxmlformats.org/drawingml/2006/main">
               <a:ext uri="{FF2B5EF4-FFF2-40B4-BE49-F238E27FC236}">
-                <a16:creationId xmlns:a16="http://schemas.microsoft.com/office/drawing/2014/main" id="{D86EF7F2-F958-49E0-A078-66DF32A7CCCF}"/>
+                <a16:creationId xmlns:a16="http://schemas.microsoft.com/office/drawing/2014/main" id="{2D260C4E-AF35-4599-AF56-81633D287272}"/>
               </a:ext>
             </a:extLst>
           </p:cNvPr>
@@ -2548,7 +2548,7 @@
           <p:cNvPr id="4" name="">
             <a:extLst xmlns:a="http://schemas.openxmlformats.org/drawingml/2006/main">
               <a:ext uri="{FF2B5EF4-FFF2-40B4-BE49-F238E27FC236}">
-                <a16:creationId xmlns:a16="http://schemas.microsoft.com/office/drawing/2014/main" id="{582961CA-1925-45C2-B353-EE7B58CC3CBD}"/>
+                <a16:creationId xmlns:a16="http://schemas.microsoft.com/office/drawing/2014/main" id="{4CC6A41F-88C3-42D7-8987-023F5255E981}"/>
               </a:ext>
             </a:extLst>
           </p:cNvPr>
@@ -2605,7 +2605,7 @@
           <p:cNvPr id="5" name="">
             <a:extLst xmlns:a="http://schemas.openxmlformats.org/drawingml/2006/main">
               <a:ext uri="{FF2B5EF4-FFF2-40B4-BE49-F238E27FC236}">
-                <a16:creationId xmlns:a16="http://schemas.microsoft.com/office/drawing/2014/main" id="{3FC52957-B887-4D58-833F-91A332975A8C}"/>
+                <a16:creationId xmlns:a16="http://schemas.microsoft.com/office/drawing/2014/main" id="{D19B3949-AE9D-4860-8CC7-BAEB5F5F8544}"/>
               </a:ext>
             </a:extLst>
           </p:cNvPr>
@@ -2662,7 +2662,7 @@
           <p:cNvPr id="6" name="">
             <a:extLst xmlns:a="http://schemas.openxmlformats.org/drawingml/2006/main">
               <a:ext uri="{FF2B5EF4-FFF2-40B4-BE49-F238E27FC236}">
-                <a16:creationId xmlns:a16="http://schemas.microsoft.com/office/drawing/2014/main" id="{7621D156-7445-47F9-9C60-C64DBF6DFC80}"/>
+                <a16:creationId xmlns:a16="http://schemas.microsoft.com/office/drawing/2014/main" id="{07582133-8B99-4E83-A448-218E6738E272}"/>
               </a:ext>
             </a:extLst>
           </p:cNvPr>
@@ -2719,7 +2719,7 @@
           <p:cNvPr id="7" name="">
             <a:extLst xmlns:a="http://schemas.openxmlformats.org/drawingml/2006/main">
               <a:ext uri="{FF2B5EF4-FFF2-40B4-BE49-F238E27FC236}">
-                <a16:creationId xmlns:a16="http://schemas.microsoft.com/office/drawing/2014/main" id="{88FBBE46-A053-4C7F-85EF-15875E075AF9}"/>
+                <a16:creationId xmlns:a16="http://schemas.microsoft.com/office/drawing/2014/main" id="{D8611C77-AFCF-4F01-93F5-929D984BDD35}"/>
               </a:ext>
             </a:extLst>
           </p:cNvPr>
@@ -2751,7 +2751,7 @@
           <p:cNvPr id="8" name="">
             <a:extLst xmlns:a="http://schemas.openxmlformats.org/drawingml/2006/main">
               <a:ext uri="{FF2B5EF4-FFF2-40B4-BE49-F238E27FC236}">
-                <a16:creationId xmlns:a16="http://schemas.microsoft.com/office/drawing/2014/main" id="{7193A03B-D3E0-46A2-BAEB-B44CD29B0561}"/>
+                <a16:creationId xmlns:a16="http://schemas.microsoft.com/office/drawing/2014/main" id="{A0622E0A-705E-4DA5-B853-B8BE6A996A04}"/>
               </a:ext>
             </a:extLst>
           </p:cNvPr>
@@ -2808,7 +2808,7 @@
           <p:cNvPr id="9" name="">
             <a:extLst xmlns:a="http://schemas.openxmlformats.org/drawingml/2006/main">
               <a:ext uri="{FF2B5EF4-FFF2-40B4-BE49-F238E27FC236}">
-                <a16:creationId xmlns:a16="http://schemas.microsoft.com/office/drawing/2014/main" id="{D4E9850F-859D-4FFC-8414-F683DBB2105D}"/>
+                <a16:creationId xmlns:a16="http://schemas.microsoft.com/office/drawing/2014/main" id="{54E262FF-5167-44E9-9B40-09D18AF4BF6F}"/>
               </a:ext>
             </a:extLst>
           </p:cNvPr>
@@ -2865,7 +2865,7 @@
           <p:cNvPr id="10" name="">
             <a:extLst xmlns:a="http://schemas.openxmlformats.org/drawingml/2006/main">
               <a:ext uri="{FF2B5EF4-FFF2-40B4-BE49-F238E27FC236}">
-                <a16:creationId xmlns:a16="http://schemas.microsoft.com/office/drawing/2014/main" id="{603531F9-8D1C-46E7-AC3F-29E70C24CA7D}"/>
+                <a16:creationId xmlns:a16="http://schemas.microsoft.com/office/drawing/2014/main" id="{B4157C0B-70E7-4A05-85C0-6336B61FE61D}"/>
               </a:ext>
             </a:extLst>
           </p:cNvPr>
@@ -2922,7 +2922,7 @@
           <p:cNvPr id="11" name="">
             <a:extLst xmlns:a="http://schemas.openxmlformats.org/drawingml/2006/main">
               <a:ext uri="{FF2B5EF4-FFF2-40B4-BE49-F238E27FC236}">
-                <a16:creationId xmlns:a16="http://schemas.microsoft.com/office/drawing/2014/main" id="{5F228D24-FF6B-4C98-808D-A5DA8E6FD96A}"/>
+                <a16:creationId xmlns:a16="http://schemas.microsoft.com/office/drawing/2014/main" id="{84FF2DD9-970E-4023-9935-34B8183001BB}"/>
               </a:ext>
             </a:extLst>
           </p:cNvPr>
@@ -2979,7 +2979,7 @@
           <p:cNvPr id="12" name="">
             <a:extLst xmlns:a="http://schemas.openxmlformats.org/drawingml/2006/main">
               <a:ext uri="{FF2B5EF4-FFF2-40B4-BE49-F238E27FC236}">
-                <a16:creationId xmlns:a16="http://schemas.microsoft.com/office/drawing/2014/main" id="{9D3404D7-B19D-425B-8732-3C3C0CEE997E}"/>
+                <a16:creationId xmlns:a16="http://schemas.microsoft.com/office/drawing/2014/main" id="{B116A45C-3A4B-4014-A423-66EF39C8AEF2}"/>
               </a:ext>
             </a:extLst>
           </p:cNvPr>
@@ -3036,7 +3036,7 @@
           <p:cNvPr id="13" name="">
             <a:extLst xmlns:a="http://schemas.openxmlformats.org/drawingml/2006/main">
               <a:ext uri="{FF2B5EF4-FFF2-40B4-BE49-F238E27FC236}">
-                <a16:creationId xmlns:a16="http://schemas.microsoft.com/office/drawing/2014/main" id="{DC1C8C8D-4FB9-4891-9CFE-8407AA27588F}"/>
+                <a16:creationId xmlns:a16="http://schemas.microsoft.com/office/drawing/2014/main" id="{8DF1A4E4-AAB7-4180-8DDF-CB909EEE7DB7}"/>
               </a:ext>
             </a:extLst>
           </p:cNvPr>
@@ -3091,7 +3091,7 @@
     </p:spTree>
     <p:extLst>
       <p:ext uri="{BB962C8B-B14F-4D97-AF65-F5344CB8AC3E}">
-        <p14:creationId xmlns:p14="http://schemas.microsoft.com/office/powerpoint/2010/main" val="2142830982"/>
+        <p14:creationId xmlns:p14="http://schemas.microsoft.com/office/powerpoint/2010/main" val="1694637392"/>
       </p:ext>
     </p:extLst>
   </p:cSld>
@@ -3292,7 +3292,7 @@
           <p:cNvPr id="19" name="">
             <a:extLst xmlns:a="http://schemas.openxmlformats.org/drawingml/2006/main">
               <a:ext uri="{FF2B5EF4-FFF2-40B4-BE49-F238E27FC236}">
-                <a16:creationId xmlns:a16="http://schemas.microsoft.com/office/drawing/2014/main" id="{F0720AAE-B2F2-4E47-8A1B-98B0941ACAC3}"/>
+                <a16:creationId xmlns:a16="http://schemas.microsoft.com/office/drawing/2014/main" id="{EB9DCD66-D32E-4911-BD53-891E01DF7051}"/>
               </a:ext>
             </a:extLst>
           </p:cNvPr>
@@ -3324,7 +3324,7 @@
           <p:cNvPr id="2" name="">
             <a:extLst xmlns:a="http://schemas.openxmlformats.org/drawingml/2006/main">
               <a:ext uri="{FF2B5EF4-FFF2-40B4-BE49-F238E27FC236}">
-                <a16:creationId xmlns:a16="http://schemas.microsoft.com/office/drawing/2014/main" id="{82F1887C-5EA2-44B6-ADDF-DDDCEBCA2FAB}"/>
+                <a16:creationId xmlns:a16="http://schemas.microsoft.com/office/drawing/2014/main" id="{577ECD89-2232-4F38-8F65-ABAB64297D02}"/>
               </a:ext>
             </a:extLst>
           </p:cNvPr>
@@ -3381,7 +3381,7 @@
           <p:cNvPr id="3" name="">
             <a:extLst xmlns:a="http://schemas.openxmlformats.org/drawingml/2006/main">
               <a:ext uri="{FF2B5EF4-FFF2-40B4-BE49-F238E27FC236}">
-                <a16:creationId xmlns:a16="http://schemas.microsoft.com/office/drawing/2014/main" id="{FA406D9A-4397-4F27-9951-43C389B53213}"/>
+                <a16:creationId xmlns:a16="http://schemas.microsoft.com/office/drawing/2014/main" id="{3F276C9E-443C-44F9-8455-5880E6FC9986}"/>
               </a:ext>
             </a:extLst>
           </p:cNvPr>
@@ -3413,7 +3413,7 @@
           <p:cNvPr id="4" name="">
             <a:extLst xmlns:a="http://schemas.openxmlformats.org/drawingml/2006/main">
               <a:ext uri="{FF2B5EF4-FFF2-40B4-BE49-F238E27FC236}">
-                <a16:creationId xmlns:a16="http://schemas.microsoft.com/office/drawing/2014/main" id="{197C84C0-5AA4-4C80-9D33-5C0752B36ABC}"/>
+                <a16:creationId xmlns:a16="http://schemas.microsoft.com/office/drawing/2014/main" id="{286210C6-1FAA-4313-896F-4F2EB9B6B01A}"/>
               </a:ext>
             </a:extLst>
           </p:cNvPr>
@@ -3470,7 +3470,7 @@
           <p:cNvPr id="5" name="">
             <a:extLst xmlns:a="http://schemas.openxmlformats.org/drawingml/2006/main">
               <a:ext uri="{FF2B5EF4-FFF2-40B4-BE49-F238E27FC236}">
-                <a16:creationId xmlns:a16="http://schemas.microsoft.com/office/drawing/2014/main" id="{F45DE435-3ADA-4F12-9495-3884F95CC87C}"/>
+                <a16:creationId xmlns:a16="http://schemas.microsoft.com/office/drawing/2014/main" id="{0FF87A27-F4A4-4C51-97A3-F1B50F7ABC65}"/>
               </a:ext>
             </a:extLst>
           </p:cNvPr>
@@ -3527,7 +3527,7 @@
           <p:cNvPr id="6" name="">
             <a:extLst xmlns:a="http://schemas.openxmlformats.org/drawingml/2006/main">
               <a:ext uri="{FF2B5EF4-FFF2-40B4-BE49-F238E27FC236}">
-                <a16:creationId xmlns:a16="http://schemas.microsoft.com/office/drawing/2014/main" id="{33D81F9C-24A5-40D0-991D-BFED0C43DD59}"/>
+                <a16:creationId xmlns:a16="http://schemas.microsoft.com/office/drawing/2014/main" id="{CA956F2C-4D43-4147-9C4C-E8618C1D1166}"/>
               </a:ext>
             </a:extLst>
           </p:cNvPr>
@@ -3584,7 +3584,7 @@
           <p:cNvPr id="7" name="">
             <a:extLst xmlns:a="http://schemas.openxmlformats.org/drawingml/2006/main">
               <a:ext uri="{FF2B5EF4-FFF2-40B4-BE49-F238E27FC236}">
-                <a16:creationId xmlns:a16="http://schemas.microsoft.com/office/drawing/2014/main" id="{8882D37B-F506-4FCB-A6A9-3CDFD6AB18C2}"/>
+                <a16:creationId xmlns:a16="http://schemas.microsoft.com/office/drawing/2014/main" id="{BA53AE87-9166-4B1E-9FA7-8433A5065808}"/>
               </a:ext>
             </a:extLst>
           </p:cNvPr>
@@ -3616,7 +3616,7 @@
           <p:cNvPr id="8" name="">
             <a:extLst xmlns:a="http://schemas.openxmlformats.org/drawingml/2006/main">
               <a:ext uri="{FF2B5EF4-FFF2-40B4-BE49-F238E27FC236}">
-                <a16:creationId xmlns:a16="http://schemas.microsoft.com/office/drawing/2014/main" id="{AFE3814A-1B81-4BFE-AD0F-0226C5FC313C}"/>
+                <a16:creationId xmlns:a16="http://schemas.microsoft.com/office/drawing/2014/main" id="{844A63F9-4085-47AB-81D9-7D3B42440E87}"/>
               </a:ext>
             </a:extLst>
           </p:cNvPr>
@@ -3673,7 +3673,7 @@
           <p:cNvPr id="9" name="">
             <a:extLst xmlns:a="http://schemas.openxmlformats.org/drawingml/2006/main">
               <a:ext uri="{FF2B5EF4-FFF2-40B4-BE49-F238E27FC236}">
-                <a16:creationId xmlns:a16="http://schemas.microsoft.com/office/drawing/2014/main" id="{DEFF0583-668C-487E-B4FD-2C6CA68E5F7C}"/>
+                <a16:creationId xmlns:a16="http://schemas.microsoft.com/office/drawing/2014/main" id="{83C3FC79-725A-4674-981A-5F01113A1927}"/>
               </a:ext>
             </a:extLst>
           </p:cNvPr>
@@ -3730,7 +3730,7 @@
           <p:cNvPr id="10" name="">
             <a:extLst xmlns:a="http://schemas.openxmlformats.org/drawingml/2006/main">
               <a:ext uri="{FF2B5EF4-FFF2-40B4-BE49-F238E27FC236}">
-                <a16:creationId xmlns:a16="http://schemas.microsoft.com/office/drawing/2014/main" id="{95F8C328-F48C-434E-AD57-55718A51D3D2}"/>
+                <a16:creationId xmlns:a16="http://schemas.microsoft.com/office/drawing/2014/main" id="{F87FB328-A604-4139-AEC3-BE44C0FEA856}"/>
               </a:ext>
             </a:extLst>
           </p:cNvPr>
@@ -3787,7 +3787,7 @@
           <p:cNvPr id="11" name="">
             <a:extLst xmlns:a="http://schemas.openxmlformats.org/drawingml/2006/main">
               <a:ext uri="{FF2B5EF4-FFF2-40B4-BE49-F238E27FC236}">
-                <a16:creationId xmlns:a16="http://schemas.microsoft.com/office/drawing/2014/main" id="{ECB86010-686C-4F90-B841-39E9B24248AE}"/>
+                <a16:creationId xmlns:a16="http://schemas.microsoft.com/office/drawing/2014/main" id="{216C803B-AF3B-41CB-958E-4769D3DA4F09}"/>
               </a:ext>
             </a:extLst>
           </p:cNvPr>
@@ -3821,7 +3821,7 @@
           <p:cNvPr id="12" name="">
             <a:extLst xmlns:a="http://schemas.openxmlformats.org/drawingml/2006/main">
               <a:ext uri="{FF2B5EF4-FFF2-40B4-BE49-F238E27FC236}">
-                <a16:creationId xmlns:a16="http://schemas.microsoft.com/office/drawing/2014/main" id="{5B3BBD16-407E-4014-9646-06CC48F6070E}"/>
+                <a16:creationId xmlns:a16="http://schemas.microsoft.com/office/drawing/2014/main" id="{44CB672F-7E85-4C41-94F2-344DE7F880ED}"/>
               </a:ext>
             </a:extLst>
           </p:cNvPr>
@@ -3878,7 +3878,7 @@
           <p:cNvPr id="13" name="">
             <a:extLst xmlns:a="http://schemas.openxmlformats.org/drawingml/2006/main">
               <a:ext uri="{FF2B5EF4-FFF2-40B4-BE49-F238E27FC236}">
-                <a16:creationId xmlns:a16="http://schemas.microsoft.com/office/drawing/2014/main" id="{DE654109-E75B-4C94-82F3-C340D1EAAF4A}"/>
+                <a16:creationId xmlns:a16="http://schemas.microsoft.com/office/drawing/2014/main" id="{DBE5B9AC-D70F-49F2-B758-F791A7A010F5}"/>
               </a:ext>
             </a:extLst>
           </p:cNvPr>
@@ -3935,7 +3935,7 @@
           <p:cNvPr id="14" name="">
             <a:extLst xmlns:a="http://schemas.openxmlformats.org/drawingml/2006/main">
               <a:ext uri="{FF2B5EF4-FFF2-40B4-BE49-F238E27FC236}">
-                <a16:creationId xmlns:a16="http://schemas.microsoft.com/office/drawing/2014/main" id="{626FC0AD-D535-41B6-9513-30FA4E61998D}"/>
+                <a16:creationId xmlns:a16="http://schemas.microsoft.com/office/drawing/2014/main" id="{F70FB3BA-9210-40DB-990C-2ECFDCFCC417}"/>
               </a:ext>
             </a:extLst>
           </p:cNvPr>
@@ -3992,7 +3992,7 @@
           <p:cNvPr id="15" name="">
             <a:extLst xmlns:a="http://schemas.openxmlformats.org/drawingml/2006/main">
               <a:ext uri="{FF2B5EF4-FFF2-40B4-BE49-F238E27FC236}">
-                <a16:creationId xmlns:a16="http://schemas.microsoft.com/office/drawing/2014/main" id="{B6114133-60E0-40A7-AFF5-B3691E683424}"/>
+                <a16:creationId xmlns:a16="http://schemas.microsoft.com/office/drawing/2014/main" id="{5281CF70-60A7-4CEF-B311-141D41B1969D}"/>
               </a:ext>
             </a:extLst>
           </p:cNvPr>
@@ -4026,7 +4026,7 @@
           <p:cNvPr id="16" name="">
             <a:extLst xmlns:a="http://schemas.openxmlformats.org/drawingml/2006/main">
               <a:ext uri="{FF2B5EF4-FFF2-40B4-BE49-F238E27FC236}">
-                <a16:creationId xmlns:a16="http://schemas.microsoft.com/office/drawing/2014/main" id="{A88D4696-2C7A-4A5B-AB72-2D5FC2799DDD}"/>
+                <a16:creationId xmlns:a16="http://schemas.microsoft.com/office/drawing/2014/main" id="{52613483-2762-4314-B42C-4617BD139BA3}"/>
               </a:ext>
             </a:extLst>
           </p:cNvPr>
@@ -4083,7 +4083,7 @@
           <p:cNvPr id="17" name="">
             <a:extLst xmlns:a="http://schemas.openxmlformats.org/drawingml/2006/main">
               <a:ext uri="{FF2B5EF4-FFF2-40B4-BE49-F238E27FC236}">
-                <a16:creationId xmlns:a16="http://schemas.microsoft.com/office/drawing/2014/main" id="{CBE927BE-0C33-41C6-9804-C5C5EC002D77}"/>
+                <a16:creationId xmlns:a16="http://schemas.microsoft.com/office/drawing/2014/main" id="{8F2FEF9D-E88B-423D-AE8D-10368A660025}"/>
               </a:ext>
             </a:extLst>
           </p:cNvPr>
@@ -4140,7 +4140,7 @@
           <p:cNvPr id="18" name="">
             <a:extLst xmlns:a="http://schemas.openxmlformats.org/drawingml/2006/main">
               <a:ext uri="{FF2B5EF4-FFF2-40B4-BE49-F238E27FC236}">
-                <a16:creationId xmlns:a16="http://schemas.microsoft.com/office/drawing/2014/main" id="{5059B2B8-03C5-4468-BC7A-3B837C306757}"/>
+                <a16:creationId xmlns:a16="http://schemas.microsoft.com/office/drawing/2014/main" id="{2124F951-8E01-4FC2-90B4-80613579EA3E}"/>
               </a:ext>
             </a:extLst>
           </p:cNvPr>
@@ -4195,7 +4195,7 @@
     </p:spTree>
     <p:extLst>
       <p:ext uri="{BB962C8B-B14F-4D97-AF65-F5344CB8AC3E}">
-        <p14:creationId xmlns:p14="http://schemas.microsoft.com/office/powerpoint/2010/main" val="1102267520"/>
+        <p14:creationId xmlns:p14="http://schemas.microsoft.com/office/powerpoint/2010/main" val="1831545946"/>
       </p:ext>
     </p:extLst>
   </p:cSld>
@@ -4350,7 +4350,7 @@
           <p:cNvPr id="23" name="">
             <a:extLst xmlns:a="http://schemas.openxmlformats.org/drawingml/2006/main">
               <a:ext uri="{FF2B5EF4-FFF2-40B4-BE49-F238E27FC236}">
-                <a16:creationId xmlns:a16="http://schemas.microsoft.com/office/drawing/2014/main" id="{B1D26B07-4E70-4544-90C9-3069571080D4}"/>
+                <a16:creationId xmlns:a16="http://schemas.microsoft.com/office/drawing/2014/main" id="{C8EA67BE-7712-4C7C-AE64-49E116CFEB7A}"/>
               </a:ext>
             </a:extLst>
           </p:cNvPr>
@@ -4382,7 +4382,7 @@
           <p:cNvPr id="2" name="">
             <a:extLst xmlns:a="http://schemas.openxmlformats.org/drawingml/2006/main">
               <a:ext uri="{FF2B5EF4-FFF2-40B4-BE49-F238E27FC236}">
-                <a16:creationId xmlns:a16="http://schemas.microsoft.com/office/drawing/2014/main" id="{B2F0A096-B9D1-491E-9E8E-07553DED01BC}"/>
+                <a16:creationId xmlns:a16="http://schemas.microsoft.com/office/drawing/2014/main" id="{8D15E572-AF8E-455A-BAA9-FEE5CE0B5230}"/>
               </a:ext>
             </a:extLst>
           </p:cNvPr>
@@ -4439,7 +4439,7 @@
           <p:cNvPr id="3" name="">
             <a:extLst xmlns:a="http://schemas.openxmlformats.org/drawingml/2006/main">
               <a:ext uri="{FF2B5EF4-FFF2-40B4-BE49-F238E27FC236}">
-                <a16:creationId xmlns:a16="http://schemas.microsoft.com/office/drawing/2014/main" id="{1A86A966-CC12-4020-89CD-A757D543A610}"/>
+                <a16:creationId xmlns:a16="http://schemas.microsoft.com/office/drawing/2014/main" id="{C7091495-5D79-41BC-A402-6A0068F52A73}"/>
               </a:ext>
             </a:extLst>
           </p:cNvPr>
@@ -4471,7 +4471,7 @@
           <p:cNvPr id="4" name="">
             <a:extLst xmlns:a="http://schemas.openxmlformats.org/drawingml/2006/main">
               <a:ext uri="{FF2B5EF4-FFF2-40B4-BE49-F238E27FC236}">
-                <a16:creationId xmlns:a16="http://schemas.microsoft.com/office/drawing/2014/main" id="{17C92BB0-724C-478D-A84C-9D7899F62026}"/>
+                <a16:creationId xmlns:a16="http://schemas.microsoft.com/office/drawing/2014/main" id="{36297B7C-FD8C-4F79-BD48-A32CFDE8B953}"/>
               </a:ext>
             </a:extLst>
           </p:cNvPr>
@@ -4528,7 +4528,7 @@
           <p:cNvPr id="5" name="">
             <a:extLst xmlns:a="http://schemas.openxmlformats.org/drawingml/2006/main">
               <a:ext uri="{FF2B5EF4-FFF2-40B4-BE49-F238E27FC236}">
-                <a16:creationId xmlns:a16="http://schemas.microsoft.com/office/drawing/2014/main" id="{48ACA364-CF06-4C83-9792-AD2C77961693}"/>
+                <a16:creationId xmlns:a16="http://schemas.microsoft.com/office/drawing/2014/main" id="{230859AE-FD3F-45A3-AD54-12FA01FF244B}"/>
               </a:ext>
             </a:extLst>
           </p:cNvPr>
@@ -4585,7 +4585,7 @@
           <p:cNvPr id="6" name="">
             <a:extLst xmlns:a="http://schemas.openxmlformats.org/drawingml/2006/main">
               <a:ext uri="{FF2B5EF4-FFF2-40B4-BE49-F238E27FC236}">
-                <a16:creationId xmlns:a16="http://schemas.microsoft.com/office/drawing/2014/main" id="{C697B505-5112-4CF1-A925-3C7744EC530D}"/>
+                <a16:creationId xmlns:a16="http://schemas.microsoft.com/office/drawing/2014/main" id="{06D4B1E2-AFDA-48E2-A295-338593E367A6}"/>
               </a:ext>
             </a:extLst>
           </p:cNvPr>
@@ -4642,7 +4642,7 @@
           <p:cNvPr id="7" name="">
             <a:extLst xmlns:a="http://schemas.openxmlformats.org/drawingml/2006/main">
               <a:ext uri="{FF2B5EF4-FFF2-40B4-BE49-F238E27FC236}">
-                <a16:creationId xmlns:a16="http://schemas.microsoft.com/office/drawing/2014/main" id="{8D9EB831-C715-40C2-ABA8-A5939FECB3A3}"/>
+                <a16:creationId xmlns:a16="http://schemas.microsoft.com/office/drawing/2014/main" id="{9DD7CC1F-E22A-48F1-AA96-5A9D7C2E2DB3}"/>
               </a:ext>
             </a:extLst>
           </p:cNvPr>
@@ -4674,7 +4674,7 @@
           <p:cNvPr id="8" name="">
             <a:extLst xmlns:a="http://schemas.openxmlformats.org/drawingml/2006/main">
               <a:ext uri="{FF2B5EF4-FFF2-40B4-BE49-F238E27FC236}">
-                <a16:creationId xmlns:a16="http://schemas.microsoft.com/office/drawing/2014/main" id="{E9F5FAD7-7FCA-46C5-BBCD-5E292B44D964}"/>
+                <a16:creationId xmlns:a16="http://schemas.microsoft.com/office/drawing/2014/main" id="{F81E8311-3103-445B-A7F5-0F44CDFC7AFA}"/>
               </a:ext>
             </a:extLst>
           </p:cNvPr>
@@ -4731,7 +4731,7 @@
           <p:cNvPr id="9" name="">
             <a:extLst xmlns:a="http://schemas.openxmlformats.org/drawingml/2006/main">
               <a:ext uri="{FF2B5EF4-FFF2-40B4-BE49-F238E27FC236}">
-                <a16:creationId xmlns:a16="http://schemas.microsoft.com/office/drawing/2014/main" id="{A1099E5E-4FD7-4201-8B06-32BE11567C94}"/>
+                <a16:creationId xmlns:a16="http://schemas.microsoft.com/office/drawing/2014/main" id="{FD0F675C-98A2-4F50-8B27-72C029468710}"/>
               </a:ext>
             </a:extLst>
           </p:cNvPr>
@@ -4788,7 +4788,7 @@
           <p:cNvPr id="10" name="">
             <a:extLst xmlns:a="http://schemas.openxmlformats.org/drawingml/2006/main">
               <a:ext uri="{FF2B5EF4-FFF2-40B4-BE49-F238E27FC236}">
-                <a16:creationId xmlns:a16="http://schemas.microsoft.com/office/drawing/2014/main" id="{FFF42347-C754-44E3-BD37-54D183E43840}"/>
+                <a16:creationId xmlns:a16="http://schemas.microsoft.com/office/drawing/2014/main" id="{594D2D19-D5A4-44D8-8B11-93D9893F4A4C}"/>
               </a:ext>
             </a:extLst>
           </p:cNvPr>
@@ -4822,7 +4822,7 @@
           <p:cNvPr id="11" name="">
             <a:extLst xmlns:a="http://schemas.openxmlformats.org/drawingml/2006/main">
               <a:ext uri="{FF2B5EF4-FFF2-40B4-BE49-F238E27FC236}">
-                <a16:creationId xmlns:a16="http://schemas.microsoft.com/office/drawing/2014/main" id="{A097EA78-F1B6-421B-84C5-F21894937090}"/>
+                <a16:creationId xmlns:a16="http://schemas.microsoft.com/office/drawing/2014/main" id="{E918351D-E3FD-47FD-97FD-ACFD2C72F6DB}"/>
               </a:ext>
             </a:extLst>
           </p:cNvPr>
@@ -4854,7 +4854,7 @@
           <p:cNvPr id="12" name="">
             <a:extLst xmlns:a="http://schemas.openxmlformats.org/drawingml/2006/main">
               <a:ext uri="{FF2B5EF4-FFF2-40B4-BE49-F238E27FC236}">
-                <a16:creationId xmlns:a16="http://schemas.microsoft.com/office/drawing/2014/main" id="{88493573-C6A2-4A8B-AD2E-62671054E6F9}"/>
+                <a16:creationId xmlns:a16="http://schemas.microsoft.com/office/drawing/2014/main" id="{8A48959E-B52B-4D6C-B7C2-C255CC3AEA63}"/>
               </a:ext>
             </a:extLst>
           </p:cNvPr>
@@ -4911,7 +4911,7 @@
           <p:cNvPr id="13" name="">
             <a:extLst xmlns:a="http://schemas.openxmlformats.org/drawingml/2006/main">
               <a:ext uri="{FF2B5EF4-FFF2-40B4-BE49-F238E27FC236}">
-                <a16:creationId xmlns:a16="http://schemas.microsoft.com/office/drawing/2014/main" id="{7A4659AC-2EB0-4103-B0FF-A7639E66FC25}"/>
+                <a16:creationId xmlns:a16="http://schemas.microsoft.com/office/drawing/2014/main" id="{43AC5926-647D-4B75-817C-9B773E4130AD}"/>
               </a:ext>
             </a:extLst>
           </p:cNvPr>
@@ -4968,7 +4968,7 @@
           <p:cNvPr id="14" name="">
             <a:extLst xmlns:a="http://schemas.openxmlformats.org/drawingml/2006/main">
               <a:ext uri="{FF2B5EF4-FFF2-40B4-BE49-F238E27FC236}">
-                <a16:creationId xmlns:a16="http://schemas.microsoft.com/office/drawing/2014/main" id="{76B11774-EE93-40AC-B738-D3373A69E8FC}"/>
+                <a16:creationId xmlns:a16="http://schemas.microsoft.com/office/drawing/2014/main" id="{FBA4DE23-E7B6-4433-802B-BD187234914D}"/>
               </a:ext>
             </a:extLst>
           </p:cNvPr>
@@ -5002,7 +5002,7 @@
           <p:cNvPr id="15" name="">
             <a:extLst xmlns:a="http://schemas.openxmlformats.org/drawingml/2006/main">
               <a:ext uri="{FF2B5EF4-FFF2-40B4-BE49-F238E27FC236}">
-                <a16:creationId xmlns:a16="http://schemas.microsoft.com/office/drawing/2014/main" id="{592D3EF8-33E4-4C68-9BE9-F2950C653D0F}"/>
+                <a16:creationId xmlns:a16="http://schemas.microsoft.com/office/drawing/2014/main" id="{D8838AEF-9B4E-4315-A689-7B442926B717}"/>
               </a:ext>
             </a:extLst>
           </p:cNvPr>
@@ -5034,7 +5034,7 @@
           <p:cNvPr id="16" name="">
             <a:extLst xmlns:a="http://schemas.openxmlformats.org/drawingml/2006/main">
               <a:ext uri="{FF2B5EF4-FFF2-40B4-BE49-F238E27FC236}">
-                <a16:creationId xmlns:a16="http://schemas.microsoft.com/office/drawing/2014/main" id="{7F377B94-7A00-43B6-A49D-008A34972FE0}"/>
+                <a16:creationId xmlns:a16="http://schemas.microsoft.com/office/drawing/2014/main" id="{56FB4438-3419-44BF-9275-A00A1D2F3BF9}"/>
               </a:ext>
             </a:extLst>
           </p:cNvPr>
@@ -5091,7 +5091,7 @@
           <p:cNvPr id="17" name="">
             <a:extLst xmlns:a="http://schemas.openxmlformats.org/drawingml/2006/main">
               <a:ext uri="{FF2B5EF4-FFF2-40B4-BE49-F238E27FC236}">
-                <a16:creationId xmlns:a16="http://schemas.microsoft.com/office/drawing/2014/main" id="{12075DB2-0FEA-4628-B82C-0030887393D9}"/>
+                <a16:creationId xmlns:a16="http://schemas.microsoft.com/office/drawing/2014/main" id="{AC556F72-2ECB-46CD-B33E-FC31C92CA569}"/>
               </a:ext>
             </a:extLst>
           </p:cNvPr>
@@ -5148,7 +5148,7 @@
           <p:cNvPr id="18" name="">
             <a:extLst xmlns:a="http://schemas.openxmlformats.org/drawingml/2006/main">
               <a:ext uri="{FF2B5EF4-FFF2-40B4-BE49-F238E27FC236}">
-                <a16:creationId xmlns:a16="http://schemas.microsoft.com/office/drawing/2014/main" id="{AAD2E5FD-0036-4AC3-9E1A-D57A69E54A59}"/>
+                <a16:creationId xmlns:a16="http://schemas.microsoft.com/office/drawing/2014/main" id="{77B2060B-14C5-488E-9F94-9BA4DAE1CA6B}"/>
               </a:ext>
             </a:extLst>
           </p:cNvPr>
@@ -5182,7 +5182,7 @@
           <p:cNvPr id="19" name="">
             <a:extLst xmlns:a="http://schemas.openxmlformats.org/drawingml/2006/main">
               <a:ext uri="{FF2B5EF4-FFF2-40B4-BE49-F238E27FC236}">
-                <a16:creationId xmlns:a16="http://schemas.microsoft.com/office/drawing/2014/main" id="{F9582DDD-4754-440B-97FC-28BBA55FC0D9}"/>
+                <a16:creationId xmlns:a16="http://schemas.microsoft.com/office/drawing/2014/main" id="{5DBA4272-8C99-4B31-9D31-F145F5972680}"/>
               </a:ext>
             </a:extLst>
           </p:cNvPr>
@@ -5214,7 +5214,7 @@
           <p:cNvPr id="20" name="">
             <a:extLst xmlns:a="http://schemas.openxmlformats.org/drawingml/2006/main">
               <a:ext uri="{FF2B5EF4-FFF2-40B4-BE49-F238E27FC236}">
-                <a16:creationId xmlns:a16="http://schemas.microsoft.com/office/drawing/2014/main" id="{60D3DE3B-6D7F-4DD6-A105-DCC3C8D417C2}"/>
+                <a16:creationId xmlns:a16="http://schemas.microsoft.com/office/drawing/2014/main" id="{A46FA47A-BC8D-48B5-A6C9-474C79A066D0}"/>
               </a:ext>
             </a:extLst>
           </p:cNvPr>
@@ -5271,7 +5271,7 @@
           <p:cNvPr id="21" name="">
             <a:extLst xmlns:a="http://schemas.openxmlformats.org/drawingml/2006/main">
               <a:ext uri="{FF2B5EF4-FFF2-40B4-BE49-F238E27FC236}">
-                <a16:creationId xmlns:a16="http://schemas.microsoft.com/office/drawing/2014/main" id="{86006568-F286-4C2B-B244-9945FF24260B}"/>
+                <a16:creationId xmlns:a16="http://schemas.microsoft.com/office/drawing/2014/main" id="{84DA67D9-9D20-49B3-90B9-F2AE5F9E4F60}"/>
               </a:ext>
             </a:extLst>
           </p:cNvPr>
@@ -5328,7 +5328,7 @@
           <p:cNvPr id="22" name="">
             <a:extLst xmlns:a="http://schemas.openxmlformats.org/drawingml/2006/main">
               <a:ext uri="{FF2B5EF4-FFF2-40B4-BE49-F238E27FC236}">
-                <a16:creationId xmlns:a16="http://schemas.microsoft.com/office/drawing/2014/main" id="{6DD62656-CAE3-4E75-8888-2760DFEE0711}"/>
+                <a16:creationId xmlns:a16="http://schemas.microsoft.com/office/drawing/2014/main" id="{424DA112-05B5-4023-BE00-E872F62A3BEA}"/>
               </a:ext>
             </a:extLst>
           </p:cNvPr>
@@ -5383,7 +5383,7 @@
     </p:spTree>
     <p:extLst>
       <p:ext uri="{BB962C8B-B14F-4D97-AF65-F5344CB8AC3E}">
-        <p14:creationId xmlns:p14="http://schemas.microsoft.com/office/powerpoint/2010/main" val="1733554865"/>
+        <p14:creationId xmlns:p14="http://schemas.microsoft.com/office/powerpoint/2010/main" val="373011259"/>
       </p:ext>
     </p:extLst>
   </p:cSld>
@@ -5584,7 +5584,7 @@
           <p:cNvPr id="23" name="">
             <a:extLst xmlns:a="http://schemas.openxmlformats.org/drawingml/2006/main">
               <a:ext uri="{FF2B5EF4-FFF2-40B4-BE49-F238E27FC236}">
-                <a16:creationId xmlns:a16="http://schemas.microsoft.com/office/drawing/2014/main" id="{D3E8C2C3-A908-41B3-8BE4-889293CC1F3C}"/>
+                <a16:creationId xmlns:a16="http://schemas.microsoft.com/office/drawing/2014/main" id="{9E56358E-3DD0-41C7-9DEB-421226AD317A}"/>
               </a:ext>
             </a:extLst>
           </p:cNvPr>
@@ -5616,7 +5616,7 @@
           <p:cNvPr id="2" name="">
             <a:extLst xmlns:a="http://schemas.openxmlformats.org/drawingml/2006/main">
               <a:ext uri="{FF2B5EF4-FFF2-40B4-BE49-F238E27FC236}">
-                <a16:creationId xmlns:a16="http://schemas.microsoft.com/office/drawing/2014/main" id="{7D3FB96E-F139-49DB-9301-8480B64BBDAE}"/>
+                <a16:creationId xmlns:a16="http://schemas.microsoft.com/office/drawing/2014/main" id="{F335A504-C0EE-429B-AC58-A88AAFA74960}"/>
               </a:ext>
             </a:extLst>
           </p:cNvPr>
@@ -5673,7 +5673,7 @@
           <p:cNvPr id="3" name="">
             <a:extLst xmlns:a="http://schemas.openxmlformats.org/drawingml/2006/main">
               <a:ext uri="{FF2B5EF4-FFF2-40B4-BE49-F238E27FC236}">
-                <a16:creationId xmlns:a16="http://schemas.microsoft.com/office/drawing/2014/main" id="{90E6227A-698C-4CFD-A432-3681ABFB5F0A}"/>
+                <a16:creationId xmlns:a16="http://schemas.microsoft.com/office/drawing/2014/main" id="{B97F6395-24AE-4032-848B-2E27BA7D0183}"/>
               </a:ext>
             </a:extLst>
           </p:cNvPr>
@@ -5705,7 +5705,7 @@
           <p:cNvPr id="4" name="">
             <a:extLst xmlns:a="http://schemas.openxmlformats.org/drawingml/2006/main">
               <a:ext uri="{FF2B5EF4-FFF2-40B4-BE49-F238E27FC236}">
-                <a16:creationId xmlns:a16="http://schemas.microsoft.com/office/drawing/2014/main" id="{1F9C2362-BF4A-45CA-8E78-E9ADC6937F9B}"/>
+                <a16:creationId xmlns:a16="http://schemas.microsoft.com/office/drawing/2014/main" id="{E81E4150-8E09-4D0A-BC20-D4700DDE0770}"/>
               </a:ext>
             </a:extLst>
           </p:cNvPr>
@@ -5762,7 +5762,7 @@
           <p:cNvPr id="5" name="">
             <a:extLst xmlns:a="http://schemas.openxmlformats.org/drawingml/2006/main">
               <a:ext uri="{FF2B5EF4-FFF2-40B4-BE49-F238E27FC236}">
-                <a16:creationId xmlns:a16="http://schemas.microsoft.com/office/drawing/2014/main" id="{7EB6C24B-D75F-4FEC-B729-D092F342C0FD}"/>
+                <a16:creationId xmlns:a16="http://schemas.microsoft.com/office/drawing/2014/main" id="{4BC85B32-3E6C-4D3C-B5CD-1C54EFA96A7E}"/>
               </a:ext>
             </a:extLst>
           </p:cNvPr>
@@ -5819,7 +5819,7 @@
           <p:cNvPr id="6" name="">
             <a:extLst xmlns:a="http://schemas.openxmlformats.org/drawingml/2006/main">
               <a:ext uri="{FF2B5EF4-FFF2-40B4-BE49-F238E27FC236}">
-                <a16:creationId xmlns:a16="http://schemas.microsoft.com/office/drawing/2014/main" id="{3AA51643-9787-4176-A605-2C29BD41A5EE}"/>
+                <a16:creationId xmlns:a16="http://schemas.microsoft.com/office/drawing/2014/main" id="{0089887B-341D-43FF-B48E-FCE43C4EE622}"/>
               </a:ext>
             </a:extLst>
           </p:cNvPr>
@@ -5876,7 +5876,7 @@
           <p:cNvPr id="7" name="">
             <a:extLst xmlns:a="http://schemas.openxmlformats.org/drawingml/2006/main">
               <a:ext uri="{FF2B5EF4-FFF2-40B4-BE49-F238E27FC236}">
-                <a16:creationId xmlns:a16="http://schemas.microsoft.com/office/drawing/2014/main" id="{AE32373F-090B-44A8-92B4-5393E25BD199}"/>
+                <a16:creationId xmlns:a16="http://schemas.microsoft.com/office/drawing/2014/main" id="{566C983D-1C3A-46D3-A0AD-CC5229B6BFA2}"/>
               </a:ext>
             </a:extLst>
           </p:cNvPr>
@@ -5908,7 +5908,7 @@
           <p:cNvPr id="8" name="">
             <a:extLst xmlns:a="http://schemas.openxmlformats.org/drawingml/2006/main">
               <a:ext uri="{FF2B5EF4-FFF2-40B4-BE49-F238E27FC236}">
-                <a16:creationId xmlns:a16="http://schemas.microsoft.com/office/drawing/2014/main" id="{D383DEF4-7B58-4B56-AE38-83CBCFB97AD3}"/>
+                <a16:creationId xmlns:a16="http://schemas.microsoft.com/office/drawing/2014/main" id="{FE70ECE1-1F20-44BA-8777-4E3DD277FBB7}"/>
               </a:ext>
             </a:extLst>
           </p:cNvPr>
@@ -5965,7 +5965,7 @@
           <p:cNvPr id="9" name="">
             <a:extLst xmlns:a="http://schemas.openxmlformats.org/drawingml/2006/main">
               <a:ext uri="{FF2B5EF4-FFF2-40B4-BE49-F238E27FC236}">
-                <a16:creationId xmlns:a16="http://schemas.microsoft.com/office/drawing/2014/main" id="{45FCF8A6-0424-4DFD-B0C2-4BCD82590E7C}"/>
+                <a16:creationId xmlns:a16="http://schemas.microsoft.com/office/drawing/2014/main" id="{FF4FB7C7-1686-4325-AE5B-6193A70D9681}"/>
               </a:ext>
             </a:extLst>
           </p:cNvPr>
@@ -6022,7 +6022,7 @@
           <p:cNvPr id="10" name="">
             <a:extLst xmlns:a="http://schemas.openxmlformats.org/drawingml/2006/main">
               <a:ext uri="{FF2B5EF4-FFF2-40B4-BE49-F238E27FC236}">
-                <a16:creationId xmlns:a16="http://schemas.microsoft.com/office/drawing/2014/main" id="{322303A6-391B-4FBE-AA8B-3D85BE1ACA30}"/>
+                <a16:creationId xmlns:a16="http://schemas.microsoft.com/office/drawing/2014/main" id="{DC59DDEB-8C8A-4C14-A2FD-976F44A0348A}"/>
               </a:ext>
             </a:extLst>
           </p:cNvPr>
@@ -6056,7 +6056,7 @@
           <p:cNvPr id="11" name="">
             <a:extLst xmlns:a="http://schemas.openxmlformats.org/drawingml/2006/main">
               <a:ext uri="{FF2B5EF4-FFF2-40B4-BE49-F238E27FC236}">
-                <a16:creationId xmlns:a16="http://schemas.microsoft.com/office/drawing/2014/main" id="{E8D17624-092C-42B3-B6BF-46BF8424A3B0}"/>
+                <a16:creationId xmlns:a16="http://schemas.microsoft.com/office/drawing/2014/main" id="{0EEFACF2-2D13-44BE-832C-F99372C1E63C}"/>
               </a:ext>
             </a:extLst>
           </p:cNvPr>
@@ -6088,7 +6088,7 @@
           <p:cNvPr id="12" name="">
             <a:extLst xmlns:a="http://schemas.openxmlformats.org/drawingml/2006/main">
               <a:ext uri="{FF2B5EF4-FFF2-40B4-BE49-F238E27FC236}">
-                <a16:creationId xmlns:a16="http://schemas.microsoft.com/office/drawing/2014/main" id="{19281FB8-9BFD-4D00-A0FC-EB4D138AF765}"/>
+                <a16:creationId xmlns:a16="http://schemas.microsoft.com/office/drawing/2014/main" id="{B081F4C9-C5FF-426E-A81F-418C44F3235A}"/>
               </a:ext>
             </a:extLst>
           </p:cNvPr>
@@ -6145,7 +6145,7 @@
           <p:cNvPr id="13" name="">
             <a:extLst xmlns:a="http://schemas.openxmlformats.org/drawingml/2006/main">
               <a:ext uri="{FF2B5EF4-FFF2-40B4-BE49-F238E27FC236}">
-                <a16:creationId xmlns:a16="http://schemas.microsoft.com/office/drawing/2014/main" id="{3C0F35B8-F188-4928-B411-C61150E510EC}"/>
+                <a16:creationId xmlns:a16="http://schemas.microsoft.com/office/drawing/2014/main" id="{BA519573-4006-42B1-A7F4-5B278EDACA10}"/>
               </a:ext>
             </a:extLst>
           </p:cNvPr>
@@ -6202,7 +6202,7 @@
           <p:cNvPr id="14" name="">
             <a:extLst xmlns:a="http://schemas.openxmlformats.org/drawingml/2006/main">
               <a:ext uri="{FF2B5EF4-FFF2-40B4-BE49-F238E27FC236}">
-                <a16:creationId xmlns:a16="http://schemas.microsoft.com/office/drawing/2014/main" id="{B5C69C3B-6240-41C2-B79A-063C9FFFD878}"/>
+                <a16:creationId xmlns:a16="http://schemas.microsoft.com/office/drawing/2014/main" id="{CECD763E-C471-44E1-A462-E18DEBF5F892}"/>
               </a:ext>
             </a:extLst>
           </p:cNvPr>
@@ -6236,7 +6236,7 @@
           <p:cNvPr id="15" name="">
             <a:extLst xmlns:a="http://schemas.openxmlformats.org/drawingml/2006/main">
               <a:ext uri="{FF2B5EF4-FFF2-40B4-BE49-F238E27FC236}">
-                <a16:creationId xmlns:a16="http://schemas.microsoft.com/office/drawing/2014/main" id="{5C1A860F-5C60-4648-BA7E-1316444A108B}"/>
+                <a16:creationId xmlns:a16="http://schemas.microsoft.com/office/drawing/2014/main" id="{B436E845-A764-4515-853B-F63006E547C2}"/>
               </a:ext>
             </a:extLst>
           </p:cNvPr>
@@ -6268,7 +6268,7 @@
           <p:cNvPr id="16" name="">
             <a:extLst xmlns:a="http://schemas.openxmlformats.org/drawingml/2006/main">
               <a:ext uri="{FF2B5EF4-FFF2-40B4-BE49-F238E27FC236}">
-                <a16:creationId xmlns:a16="http://schemas.microsoft.com/office/drawing/2014/main" id="{A1A70699-AAC5-4797-A142-9432EFE52FDE}"/>
+                <a16:creationId xmlns:a16="http://schemas.microsoft.com/office/drawing/2014/main" id="{541A3D2B-7D37-45C9-9742-75E7BD140698}"/>
               </a:ext>
             </a:extLst>
           </p:cNvPr>
@@ -6325,7 +6325,7 @@
           <p:cNvPr id="17" name="">
             <a:extLst xmlns:a="http://schemas.openxmlformats.org/drawingml/2006/main">
               <a:ext uri="{FF2B5EF4-FFF2-40B4-BE49-F238E27FC236}">
-                <a16:creationId xmlns:a16="http://schemas.microsoft.com/office/drawing/2014/main" id="{54C1F988-15B8-4C8C-9BB5-C495AE56C41D}"/>
+                <a16:creationId xmlns:a16="http://schemas.microsoft.com/office/drawing/2014/main" id="{B85AC83C-7DF7-4E04-9915-55B10331D6FC}"/>
               </a:ext>
             </a:extLst>
           </p:cNvPr>
@@ -6382,7 +6382,7 @@
           <p:cNvPr id="18" name="">
             <a:extLst xmlns:a="http://schemas.openxmlformats.org/drawingml/2006/main">
               <a:ext uri="{FF2B5EF4-FFF2-40B4-BE49-F238E27FC236}">
-                <a16:creationId xmlns:a16="http://schemas.microsoft.com/office/drawing/2014/main" id="{488E43C5-45F7-4600-974D-75C6C53C7E50}"/>
+                <a16:creationId xmlns:a16="http://schemas.microsoft.com/office/drawing/2014/main" id="{6F6538F9-53B3-443D-AAF5-C5F91F8849E1}"/>
               </a:ext>
             </a:extLst>
           </p:cNvPr>
@@ -6416,7 +6416,7 @@
           <p:cNvPr id="19" name="">
             <a:extLst xmlns:a="http://schemas.openxmlformats.org/drawingml/2006/main">
               <a:ext uri="{FF2B5EF4-FFF2-40B4-BE49-F238E27FC236}">
-                <a16:creationId xmlns:a16="http://schemas.microsoft.com/office/drawing/2014/main" id="{C053D9CD-5C6E-478F-91CF-3CDF9C18D6A7}"/>
+                <a16:creationId xmlns:a16="http://schemas.microsoft.com/office/drawing/2014/main" id="{8C9A43F3-6969-40FC-9F6D-E3D411467C51}"/>
               </a:ext>
             </a:extLst>
           </p:cNvPr>
@@ -6448,7 +6448,7 @@
           <p:cNvPr id="20" name="">
             <a:extLst xmlns:a="http://schemas.openxmlformats.org/drawingml/2006/main">
               <a:ext uri="{FF2B5EF4-FFF2-40B4-BE49-F238E27FC236}">
-                <a16:creationId xmlns:a16="http://schemas.microsoft.com/office/drawing/2014/main" id="{36E20583-BB07-4F87-84E2-EB17A77B0B9A}"/>
+                <a16:creationId xmlns:a16="http://schemas.microsoft.com/office/drawing/2014/main" id="{58EA1DA0-8A4F-4C79-A60F-FA4DA2E2FAD5}"/>
               </a:ext>
             </a:extLst>
           </p:cNvPr>
@@ -6505,7 +6505,7 @@
           <p:cNvPr id="21" name="">
             <a:extLst xmlns:a="http://schemas.openxmlformats.org/drawingml/2006/main">
               <a:ext uri="{FF2B5EF4-FFF2-40B4-BE49-F238E27FC236}">
-                <a16:creationId xmlns:a16="http://schemas.microsoft.com/office/drawing/2014/main" id="{FB0D9CE3-1C9C-4ECD-9A6A-59228C2BEC43}"/>
+                <a16:creationId xmlns:a16="http://schemas.microsoft.com/office/drawing/2014/main" id="{F38AB4C9-4946-4576-8868-F727F7279BB8}"/>
               </a:ext>
             </a:extLst>
           </p:cNvPr>
@@ -6562,7 +6562,7 @@
           <p:cNvPr id="22" name="">
             <a:extLst xmlns:a="http://schemas.openxmlformats.org/drawingml/2006/main">
               <a:ext uri="{FF2B5EF4-FFF2-40B4-BE49-F238E27FC236}">
-                <a16:creationId xmlns:a16="http://schemas.microsoft.com/office/drawing/2014/main" id="{D67504AF-0F58-4B56-85C8-2923FA63C5D1}"/>
+                <a16:creationId xmlns:a16="http://schemas.microsoft.com/office/drawing/2014/main" id="{49D40CDB-26F0-4694-A57F-BADD00635C54}"/>
               </a:ext>
             </a:extLst>
           </p:cNvPr>
@@ -6617,7 +6617,7 @@
     </p:spTree>
     <p:extLst>
       <p:ext uri="{BB962C8B-B14F-4D97-AF65-F5344CB8AC3E}">
-        <p14:creationId xmlns:p14="http://schemas.microsoft.com/office/powerpoint/2010/main" val="1243518042"/>
+        <p14:creationId xmlns:p14="http://schemas.microsoft.com/office/powerpoint/2010/main" val="1136320756"/>
       </p:ext>
     </p:extLst>
   </p:cSld>
@@ -6818,7 +6818,7 @@
           <p:cNvPr id="16" name="">
             <a:extLst xmlns:a="http://schemas.openxmlformats.org/drawingml/2006/main">
               <a:ext uri="{FF2B5EF4-FFF2-40B4-BE49-F238E27FC236}">
-                <a16:creationId xmlns:a16="http://schemas.microsoft.com/office/drawing/2014/main" id="{DE5B9CEA-82E3-4EED-91CA-06569BC90899}"/>
+                <a16:creationId xmlns:a16="http://schemas.microsoft.com/office/drawing/2014/main" id="{0140D160-ADC1-413B-9527-088873BF818A}"/>
               </a:ext>
             </a:extLst>
           </p:cNvPr>
@@ -6850,7 +6850,7 @@
           <p:cNvPr id="2" name="">
             <a:extLst xmlns:a="http://schemas.openxmlformats.org/drawingml/2006/main">
               <a:ext uri="{FF2B5EF4-FFF2-40B4-BE49-F238E27FC236}">
-                <a16:creationId xmlns:a16="http://schemas.microsoft.com/office/drawing/2014/main" id="{F253EB91-76B5-4E47-9A6D-3E6B8358961A}"/>
+                <a16:creationId xmlns:a16="http://schemas.microsoft.com/office/drawing/2014/main" id="{CFFD42C1-C70B-4E3B-AA04-5DA3EDC05EA0}"/>
               </a:ext>
             </a:extLst>
           </p:cNvPr>
@@ -6907,7 +6907,7 @@
           <p:cNvPr id="3" name="">
             <a:extLst xmlns:a="http://schemas.openxmlformats.org/drawingml/2006/main">
               <a:ext uri="{FF2B5EF4-FFF2-40B4-BE49-F238E27FC236}">
-                <a16:creationId xmlns:a16="http://schemas.microsoft.com/office/drawing/2014/main" id="{95C1FE31-51F4-46D0-BCD1-EC5ACB25EFD8}"/>
+                <a16:creationId xmlns:a16="http://schemas.microsoft.com/office/drawing/2014/main" id="{B8740260-E457-4A0E-A9A0-4BCEC4CAA0A3}"/>
               </a:ext>
             </a:extLst>
           </p:cNvPr>
@@ -6939,7 +6939,7 @@
           <p:cNvPr id="4" name="">
             <a:extLst xmlns:a="http://schemas.openxmlformats.org/drawingml/2006/main">
               <a:ext uri="{FF2B5EF4-FFF2-40B4-BE49-F238E27FC236}">
-                <a16:creationId xmlns:a16="http://schemas.microsoft.com/office/drawing/2014/main" id="{29C42F40-733F-47C4-8C35-5745E22BCC1D}"/>
+                <a16:creationId xmlns:a16="http://schemas.microsoft.com/office/drawing/2014/main" id="{721D0D96-266C-4EDB-B1FC-FE27DC1DBAFB}"/>
               </a:ext>
             </a:extLst>
           </p:cNvPr>
@@ -6996,7 +6996,7 @@
           <p:cNvPr id="5" name="">
             <a:extLst xmlns:a="http://schemas.openxmlformats.org/drawingml/2006/main">
               <a:ext uri="{FF2B5EF4-FFF2-40B4-BE49-F238E27FC236}">
-                <a16:creationId xmlns:a16="http://schemas.microsoft.com/office/drawing/2014/main" id="{CD3C5E0A-F583-4B3F-B2FA-32F3E871D7CE}"/>
+                <a16:creationId xmlns:a16="http://schemas.microsoft.com/office/drawing/2014/main" id="{68474D9B-085D-4E78-BA49-7E2998564389}"/>
               </a:ext>
             </a:extLst>
           </p:cNvPr>
@@ -7053,7 +7053,7 @@
           <p:cNvPr id="6" name="">
             <a:extLst xmlns:a="http://schemas.openxmlformats.org/drawingml/2006/main">
               <a:ext uri="{FF2B5EF4-FFF2-40B4-BE49-F238E27FC236}">
-                <a16:creationId xmlns:a16="http://schemas.microsoft.com/office/drawing/2014/main" id="{4CE97CE3-8160-4504-AE73-1BD4B89396CC}"/>
+                <a16:creationId xmlns:a16="http://schemas.microsoft.com/office/drawing/2014/main" id="{83B71945-C7B3-4190-BF56-56A1888F14FA}"/>
               </a:ext>
             </a:extLst>
           </p:cNvPr>
@@ -7110,7 +7110,7 @@
           <p:cNvPr id="7" name="">
             <a:extLst xmlns:a="http://schemas.openxmlformats.org/drawingml/2006/main">
               <a:ext uri="{FF2B5EF4-FFF2-40B4-BE49-F238E27FC236}">
-                <a16:creationId xmlns:a16="http://schemas.microsoft.com/office/drawing/2014/main" id="{1E9E60A5-8B45-40A0-AB4C-B39DCFF979D1}"/>
+                <a16:creationId xmlns:a16="http://schemas.microsoft.com/office/drawing/2014/main" id="{284E5D22-7033-4AF3-AB14-60781A091C44}"/>
               </a:ext>
             </a:extLst>
           </p:cNvPr>
@@ -7142,7 +7142,7 @@
           <p:cNvPr id="8" name="">
             <a:extLst xmlns:a="http://schemas.openxmlformats.org/drawingml/2006/main">
               <a:ext uri="{FF2B5EF4-FFF2-40B4-BE49-F238E27FC236}">
-                <a16:creationId xmlns:a16="http://schemas.microsoft.com/office/drawing/2014/main" id="{A354585A-1BF1-4DBA-BFE7-7AFC2A290139}"/>
+                <a16:creationId xmlns:a16="http://schemas.microsoft.com/office/drawing/2014/main" id="{CF78BD35-FE1A-45F0-8E68-5A6AE9D4D765}"/>
               </a:ext>
             </a:extLst>
           </p:cNvPr>
@@ -7199,7 +7199,7 @@
           <p:cNvPr id="9" name="">
             <a:extLst xmlns:a="http://schemas.openxmlformats.org/drawingml/2006/main">
               <a:ext uri="{FF2B5EF4-FFF2-40B4-BE49-F238E27FC236}">
-                <a16:creationId xmlns:a16="http://schemas.microsoft.com/office/drawing/2014/main" id="{D684C2FF-6CA7-468F-A395-93F2676B4FC7}"/>
+                <a16:creationId xmlns:a16="http://schemas.microsoft.com/office/drawing/2014/main" id="{64DA701A-AC24-4D09-AD2D-37D55D1DD74A}"/>
               </a:ext>
             </a:extLst>
           </p:cNvPr>
@@ -7256,7 +7256,7 @@
           <p:cNvPr id="10" name="">
             <a:extLst xmlns:a="http://schemas.openxmlformats.org/drawingml/2006/main">
               <a:ext uri="{FF2B5EF4-FFF2-40B4-BE49-F238E27FC236}">
-                <a16:creationId xmlns:a16="http://schemas.microsoft.com/office/drawing/2014/main" id="{0EAB0F8F-6B5A-4E87-AD79-8D850FC5ECEF}"/>
+                <a16:creationId xmlns:a16="http://schemas.microsoft.com/office/drawing/2014/main" id="{3D08764A-2872-40CC-BDF1-66C7A7585E3C}"/>
               </a:ext>
             </a:extLst>
           </p:cNvPr>
@@ -7313,7 +7313,7 @@
           <p:cNvPr id="11" name="">
             <a:extLst xmlns:a="http://schemas.openxmlformats.org/drawingml/2006/main">
               <a:ext uri="{FF2B5EF4-FFF2-40B4-BE49-F238E27FC236}">
-                <a16:creationId xmlns:a16="http://schemas.microsoft.com/office/drawing/2014/main" id="{DEBB6948-890F-4C8C-8926-6485ED4A8376}"/>
+                <a16:creationId xmlns:a16="http://schemas.microsoft.com/office/drawing/2014/main" id="{7D54BF9C-CBB0-473B-96C5-0934579E73F9}"/>
               </a:ext>
             </a:extLst>
           </p:cNvPr>
@@ -7345,7 +7345,7 @@
           <p:cNvPr id="12" name="">
             <a:extLst xmlns:a="http://schemas.openxmlformats.org/drawingml/2006/main">
               <a:ext uri="{FF2B5EF4-FFF2-40B4-BE49-F238E27FC236}">
-                <a16:creationId xmlns:a16="http://schemas.microsoft.com/office/drawing/2014/main" id="{EFED3FE1-E89E-41FC-BA9B-0BDAA98C0BEC}"/>
+                <a16:creationId xmlns:a16="http://schemas.microsoft.com/office/drawing/2014/main" id="{B766B00F-6F27-4622-9FC6-A0E0B5546033}"/>
               </a:ext>
             </a:extLst>
           </p:cNvPr>
@@ -7402,7 +7402,7 @@
           <p:cNvPr id="13" name="">
             <a:extLst xmlns:a="http://schemas.openxmlformats.org/drawingml/2006/main">
               <a:ext uri="{FF2B5EF4-FFF2-40B4-BE49-F238E27FC236}">
-                <a16:creationId xmlns:a16="http://schemas.microsoft.com/office/drawing/2014/main" id="{F519FEDE-8A73-475D-B5AE-3BA4C97D82E3}"/>
+                <a16:creationId xmlns:a16="http://schemas.microsoft.com/office/drawing/2014/main" id="{B59A6552-5828-4E5E-B1CB-0C4AD241E798}"/>
               </a:ext>
             </a:extLst>
           </p:cNvPr>
@@ -7459,7 +7459,7 @@
           <p:cNvPr id="14" name="">
             <a:extLst xmlns:a="http://schemas.openxmlformats.org/drawingml/2006/main">
               <a:ext uri="{FF2B5EF4-FFF2-40B4-BE49-F238E27FC236}">
-                <a16:creationId xmlns:a16="http://schemas.microsoft.com/office/drawing/2014/main" id="{DB4DE547-C0D9-45E2-A921-1E7FE8199362}"/>
+                <a16:creationId xmlns:a16="http://schemas.microsoft.com/office/drawing/2014/main" id="{52C9D8D6-4D3E-4A03-A61D-3B733E6162DF}"/>
               </a:ext>
             </a:extLst>
           </p:cNvPr>
@@ -7516,7 +7516,7 @@
           <p:cNvPr id="15" name="">
             <a:extLst xmlns:a="http://schemas.openxmlformats.org/drawingml/2006/main">
               <a:ext uri="{FF2B5EF4-FFF2-40B4-BE49-F238E27FC236}">
-                <a16:creationId xmlns:a16="http://schemas.microsoft.com/office/drawing/2014/main" id="{D4E48683-D92F-47E0-A412-D5776D09CB94}"/>
+                <a16:creationId xmlns:a16="http://schemas.microsoft.com/office/drawing/2014/main" id="{257347F9-4DE1-4D88-9131-2954CA49A6BB}"/>
               </a:ext>
             </a:extLst>
           </p:cNvPr>
@@ -7571,7 +7571,7 @@
     </p:spTree>
     <p:extLst>
       <p:ext uri="{BB962C8B-B14F-4D97-AF65-F5344CB8AC3E}">
-        <p14:creationId xmlns:p14="http://schemas.microsoft.com/office/powerpoint/2010/main" val="266738153"/>
+        <p14:creationId xmlns:p14="http://schemas.microsoft.com/office/powerpoint/2010/main" val="1185390762"/>
       </p:ext>
     </p:extLst>
   </p:cSld>
@@ -7772,7 +7772,7 @@
           <p:cNvPr id="23" name="">
             <a:extLst xmlns:a="http://schemas.openxmlformats.org/drawingml/2006/main">
               <a:ext uri="{FF2B5EF4-FFF2-40B4-BE49-F238E27FC236}">
-                <a16:creationId xmlns:a16="http://schemas.microsoft.com/office/drawing/2014/main" id="{1F944C8B-9FAC-4882-B266-73E77437F453}"/>
+                <a16:creationId xmlns:a16="http://schemas.microsoft.com/office/drawing/2014/main" id="{4CB70A05-8CC0-4A57-8634-1DFFC9D2A789}"/>
               </a:ext>
             </a:extLst>
           </p:cNvPr>
@@ -7804,7 +7804,7 @@
           <p:cNvPr id="2" name="">
             <a:extLst xmlns:a="http://schemas.openxmlformats.org/drawingml/2006/main">
               <a:ext uri="{FF2B5EF4-FFF2-40B4-BE49-F238E27FC236}">
-                <a16:creationId xmlns:a16="http://schemas.microsoft.com/office/drawing/2014/main" id="{B333437D-5FCF-4150-ADA2-09F4033DC6F6}"/>
+                <a16:creationId xmlns:a16="http://schemas.microsoft.com/office/drawing/2014/main" id="{B7E7EB4A-7257-450C-B1AB-A417EE517AE7}"/>
               </a:ext>
             </a:extLst>
           </p:cNvPr>
@@ -7861,7 +7861,7 @@
           <p:cNvPr id="3" name="">
             <a:extLst xmlns:a="http://schemas.openxmlformats.org/drawingml/2006/main">
               <a:ext uri="{FF2B5EF4-FFF2-40B4-BE49-F238E27FC236}">
-                <a16:creationId xmlns:a16="http://schemas.microsoft.com/office/drawing/2014/main" id="{3D545C08-C377-465F-8896-F0FAD9A77D15}"/>
+                <a16:creationId xmlns:a16="http://schemas.microsoft.com/office/drawing/2014/main" id="{740FF23A-A98C-4339-BA41-EAB227666434}"/>
               </a:ext>
             </a:extLst>
           </p:cNvPr>
@@ -7893,7 +7893,7 @@
           <p:cNvPr id="4" name="">
             <a:extLst xmlns:a="http://schemas.openxmlformats.org/drawingml/2006/main">
               <a:ext uri="{FF2B5EF4-FFF2-40B4-BE49-F238E27FC236}">
-                <a16:creationId xmlns:a16="http://schemas.microsoft.com/office/drawing/2014/main" id="{B1EF14FE-6920-4519-8CBD-D6B1B82027B8}"/>
+                <a16:creationId xmlns:a16="http://schemas.microsoft.com/office/drawing/2014/main" id="{B9CC66CD-F309-4104-BB5A-0AF782F33D3B}"/>
               </a:ext>
             </a:extLst>
           </p:cNvPr>
@@ -7950,7 +7950,7 @@
           <p:cNvPr id="5" name="">
             <a:extLst xmlns:a="http://schemas.openxmlformats.org/drawingml/2006/main">
               <a:ext uri="{FF2B5EF4-FFF2-40B4-BE49-F238E27FC236}">
-                <a16:creationId xmlns:a16="http://schemas.microsoft.com/office/drawing/2014/main" id="{08306F25-05DD-47FE-9883-98ADF7F22F08}"/>
+                <a16:creationId xmlns:a16="http://schemas.microsoft.com/office/drawing/2014/main" id="{08D46788-A897-43BF-8D7E-A1FD6BF155F6}"/>
               </a:ext>
             </a:extLst>
           </p:cNvPr>
@@ -8007,7 +8007,7 @@
           <p:cNvPr id="6" name="">
             <a:extLst xmlns:a="http://schemas.openxmlformats.org/drawingml/2006/main">
               <a:ext uri="{FF2B5EF4-FFF2-40B4-BE49-F238E27FC236}">
-                <a16:creationId xmlns:a16="http://schemas.microsoft.com/office/drawing/2014/main" id="{420221FD-F26B-4CDC-99AB-CCF471102E91}"/>
+                <a16:creationId xmlns:a16="http://schemas.microsoft.com/office/drawing/2014/main" id="{93F9DB70-9628-4EBF-A1DE-7B53CD408AF1}"/>
               </a:ext>
             </a:extLst>
           </p:cNvPr>
@@ -8064,7 +8064,7 @@
           <p:cNvPr id="7" name="">
             <a:extLst xmlns:a="http://schemas.openxmlformats.org/drawingml/2006/main">
               <a:ext uri="{FF2B5EF4-FFF2-40B4-BE49-F238E27FC236}">
-                <a16:creationId xmlns:a16="http://schemas.microsoft.com/office/drawing/2014/main" id="{33FCCEC2-B302-40B4-B3E8-88AA6925F213}"/>
+                <a16:creationId xmlns:a16="http://schemas.microsoft.com/office/drawing/2014/main" id="{F341890C-ACBB-4890-A2BF-3A3BB599889A}"/>
               </a:ext>
             </a:extLst>
           </p:cNvPr>
@@ -8096,7 +8096,7 @@
           <p:cNvPr id="8" name="">
             <a:extLst xmlns:a="http://schemas.openxmlformats.org/drawingml/2006/main">
               <a:ext uri="{FF2B5EF4-FFF2-40B4-BE49-F238E27FC236}">
-                <a16:creationId xmlns:a16="http://schemas.microsoft.com/office/drawing/2014/main" id="{62047DE9-4A23-43C1-B191-6A0B7CE5C008}"/>
+                <a16:creationId xmlns:a16="http://schemas.microsoft.com/office/drawing/2014/main" id="{AB2A75A5-8C93-4A1C-AAE0-625BC6097F77}"/>
               </a:ext>
             </a:extLst>
           </p:cNvPr>
@@ -8153,7 +8153,7 @@
           <p:cNvPr id="9" name="">
             <a:extLst xmlns:a="http://schemas.openxmlformats.org/drawingml/2006/main">
               <a:ext uri="{FF2B5EF4-FFF2-40B4-BE49-F238E27FC236}">
-                <a16:creationId xmlns:a16="http://schemas.microsoft.com/office/drawing/2014/main" id="{12BD02DB-6054-4D74-B735-9051CF0F72A9}"/>
+                <a16:creationId xmlns:a16="http://schemas.microsoft.com/office/drawing/2014/main" id="{19932FDF-CF21-4666-A545-DECA01D0A953}"/>
               </a:ext>
             </a:extLst>
           </p:cNvPr>
@@ -8210,19 +8210,19 @@
           <p:cNvPr id="10" name="">
             <a:extLst xmlns:a="http://schemas.openxmlformats.org/drawingml/2006/main">
               <a:ext uri="{FF2B5EF4-FFF2-40B4-BE49-F238E27FC236}">
-                <a16:creationId xmlns:a16="http://schemas.microsoft.com/office/drawing/2014/main" id="{B1AC2E73-6418-4D50-9090-B5AB00EFC4B6}"/>
-              </a:ext>
-            </a:extLst>
-          </p:cNvPr>
-          <p:cNvSpPr>
-            <a:spLocks xmlns:a="http://schemas.openxmlformats.org/drawingml/2006/main" noGrp="1"/>
-          </p:cNvSpPr>
-          <p:nvPr/>
-        </p:nvSpPr>
-        <p:spPr>
-          <a:xfrm xmlns:a="http://schemas.openxmlformats.org/drawingml/2006/main">
-            <a:off x="914400" y="1257300"/>
-            <a:ext cx="10363200" cy="781050"/>
+                <a16:creationId xmlns:a16="http://schemas.microsoft.com/office/drawing/2014/main" id="{7BF21649-9C0B-4C44-B9CC-54CE0B3E4F3C}"/>
+              </a:ext>
+            </a:extLst>
+          </p:cNvPr>
+          <p:cNvSpPr>
+            <a:spLocks xmlns:a="http://schemas.openxmlformats.org/drawingml/2006/main" noGrp="1"/>
+          </p:cNvSpPr>
+          <p:nvPr/>
+        </p:nvSpPr>
+        <p:spPr>
+          <a:xfrm xmlns:a="http://schemas.openxmlformats.org/drawingml/2006/main">
+            <a:off x="857250" y="1219200"/>
+            <a:ext cx="10477500" cy="742950"/>
           </a:xfrm>
           <a:prstGeom xmlns:a="http://schemas.openxmlformats.org/drawingml/2006/main" prst="rect">
             <a:avLst/>
@@ -8239,7 +8239,7 @@
           <a:lstStyle xmlns:a="http://schemas.openxmlformats.org/drawingml/2006/main"/>
           <a:p xmlns:a="http://schemas.openxmlformats.org/drawingml/2006/main">
             <a:pPr algn="ctr">
-              <a:defRPr sz="2175" b="1">
+              <a:defRPr sz="2100" b="1">
                 <a:solidFill>
                   <a:srgbClr val="17253A"/>
                 </a:solidFill>
@@ -8249,7 +8249,7 @@
               </a:defRPr>
             </a:pPr>
             <a:r>
-              <a:rPr sz="2175" b="1">
+              <a:rPr sz="2100" b="1">
                 <a:solidFill>
                   <a:srgbClr val="17253A"/>
                 </a:solidFill>
@@ -8267,28 +8267,30 @@
           <p:cNvPr id="11" name="">
             <a:extLst xmlns:a="http://schemas.openxmlformats.org/drawingml/2006/main">
               <a:ext uri="{FF2B5EF4-FFF2-40B4-BE49-F238E27FC236}">
-                <a16:creationId xmlns:a16="http://schemas.microsoft.com/office/drawing/2014/main" id="{100138E3-4D2E-432D-A88F-49BF0E0A7D11}"/>
-              </a:ext>
-            </a:extLst>
-          </p:cNvPr>
-          <p:cNvSpPr>
-            <a:spLocks xmlns:a="http://schemas.openxmlformats.org/drawingml/2006/main" noGrp="1"/>
-          </p:cNvSpPr>
-          <p:nvPr/>
-        </p:nvSpPr>
-        <p:spPr>
-          <a:xfrm xmlns:a="http://schemas.openxmlformats.org/drawingml/2006/main">
-            <a:off x="1000125" y="2247900"/>
-            <a:ext cx="476250" cy="476250"/>
-          </a:xfrm>
-          <a:prstGeom xmlns:a="http://schemas.openxmlformats.org/drawingml/2006/main" prst="ellipse">
+                <a16:creationId xmlns:a16="http://schemas.microsoft.com/office/drawing/2014/main" id="{AB8A1E33-EB7A-4BC7-A90C-5489D79B127F}"/>
+              </a:ext>
+            </a:extLst>
+          </p:cNvPr>
+          <p:cNvSpPr>
+            <a:spLocks xmlns:a="http://schemas.openxmlformats.org/drawingml/2006/main" noGrp="1"/>
+          </p:cNvSpPr>
+          <p:nvPr/>
+        </p:nvSpPr>
+        <p:spPr>
+          <a:xfrm xmlns:a="http://schemas.openxmlformats.org/drawingml/2006/main">
+            <a:off x="971550" y="2124075"/>
+            <a:ext cx="38100" cy="3524250"/>
+          </a:xfrm>
+          <a:prstGeom xmlns:a="http://schemas.openxmlformats.org/drawingml/2006/main" prst="rect">
             <a:avLst/>
           </a:prstGeom>
           <a:solidFill xmlns:a="http://schemas.openxmlformats.org/drawingml/2006/main">
-            <a:srgbClr val="18324A"/>
+            <a:srgbClr val="2C6E73"/>
           </a:solidFill>
           <a:ln xmlns:a="http://schemas.openxmlformats.org/drawingml/2006/main" w="0">
-            <a:noFill/>
+            <a:solidFill>
+              <a:srgbClr val="2C6E73"/>
+            </a:solidFill>
           </a:ln>
         </p:spPr>
       </p:sp>
@@ -8297,19 +8299,19 @@
           <p:cNvPr id="12" name="">
             <a:extLst xmlns:a="http://schemas.openxmlformats.org/drawingml/2006/main">
               <a:ext uri="{FF2B5EF4-FFF2-40B4-BE49-F238E27FC236}">
-                <a16:creationId xmlns:a16="http://schemas.microsoft.com/office/drawing/2014/main" id="{2F436381-5001-45E7-A954-F94DFA6EEA95}"/>
-              </a:ext>
-            </a:extLst>
-          </p:cNvPr>
-          <p:cNvSpPr>
-            <a:spLocks xmlns:a="http://schemas.openxmlformats.org/drawingml/2006/main" noGrp="1"/>
-          </p:cNvSpPr>
-          <p:nvPr/>
-        </p:nvSpPr>
-        <p:spPr>
-          <a:xfrm xmlns:a="http://schemas.openxmlformats.org/drawingml/2006/main">
-            <a:off x="1000125" y="2276475"/>
-            <a:ext cx="476250" cy="419100"/>
+                <a16:creationId xmlns:a16="http://schemas.microsoft.com/office/drawing/2014/main" id="{223B8ADF-524E-4DBB-A5BF-2C6912527899}"/>
+              </a:ext>
+            </a:extLst>
+          </p:cNvPr>
+          <p:cNvSpPr>
+            <a:spLocks xmlns:a="http://schemas.openxmlformats.org/drawingml/2006/main" noGrp="1"/>
+          </p:cNvSpPr>
+          <p:nvPr/>
+        </p:nvSpPr>
+        <p:spPr>
+          <a:xfrm xmlns:a="http://schemas.openxmlformats.org/drawingml/2006/main">
+            <a:off x="1162050" y="2200275"/>
+            <a:ext cx="400050" cy="400050"/>
           </a:xfrm>
           <a:prstGeom xmlns:a="http://schemas.openxmlformats.org/drawingml/2006/main" prst="rect">
             <a:avLst/>
@@ -8326,9 +8328,9 @@
           <a:lstStyle xmlns:a="http://schemas.openxmlformats.org/drawingml/2006/main"/>
           <a:p xmlns:a="http://schemas.openxmlformats.org/drawingml/2006/main">
             <a:pPr algn="ctr">
-              <a:defRPr sz="1350" b="1">
-                <a:solidFill>
-                  <a:srgbClr val="FFFFFF"/>
+              <a:defRPr sz="1125" b="1">
+                <a:solidFill>
+                  <a:srgbClr val="2C6E73"/>
                 </a:solidFill>
                 <a:latin typeface="Arial"/>
                 <a:ea typeface="Arial"/>
@@ -8336,9 +8338,9 @@
               </a:defRPr>
             </a:pPr>
             <a:r>
-              <a:rPr sz="1350" b="1">
-                <a:solidFill>
-                  <a:srgbClr val="FFFFFF"/>
+              <a:rPr sz="1125" b="1">
+                <a:solidFill>
+                  <a:srgbClr val="2C6E73"/>
                 </a:solidFill>
                 <a:latin typeface="Arial"/>
                 <a:ea typeface="Arial"/>
@@ -8354,19 +8356,19 @@
           <p:cNvPr id="13" name="">
             <a:extLst xmlns:a="http://schemas.openxmlformats.org/drawingml/2006/main">
               <a:ext uri="{FF2B5EF4-FFF2-40B4-BE49-F238E27FC236}">
-                <a16:creationId xmlns:a16="http://schemas.microsoft.com/office/drawing/2014/main" id="{22135F0F-F467-439A-9F86-6F02720D31BB}"/>
-              </a:ext>
-            </a:extLst>
-          </p:cNvPr>
-          <p:cNvSpPr>
-            <a:spLocks xmlns:a="http://schemas.openxmlformats.org/drawingml/2006/main" noGrp="1"/>
-          </p:cNvSpPr>
-          <p:nvPr/>
-        </p:nvSpPr>
-        <p:spPr>
-          <a:xfrm xmlns:a="http://schemas.openxmlformats.org/drawingml/2006/main">
-            <a:off x="1714500" y="2181225"/>
-            <a:ext cx="9429750" cy="609600"/>
+                <a16:creationId xmlns:a16="http://schemas.microsoft.com/office/drawing/2014/main" id="{4E860C32-A5EF-4B7F-88A6-8CC1327552A5}"/>
+              </a:ext>
+            </a:extLst>
+          </p:cNvPr>
+          <p:cNvSpPr>
+            <a:spLocks xmlns:a="http://schemas.openxmlformats.org/drawingml/2006/main" noGrp="1"/>
+          </p:cNvSpPr>
+          <p:nvPr/>
+        </p:nvSpPr>
+        <p:spPr>
+          <a:xfrm xmlns:a="http://schemas.openxmlformats.org/drawingml/2006/main">
+            <a:off x="1714500" y="2114550"/>
+            <a:ext cx="9525000" cy="809625"/>
           </a:xfrm>
           <a:prstGeom xmlns:a="http://schemas.openxmlformats.org/drawingml/2006/main" prst="rect">
             <a:avLst/>
@@ -8383,7 +8385,7 @@
           <a:lstStyle xmlns:a="http://schemas.openxmlformats.org/drawingml/2006/main"/>
           <a:p xmlns:a="http://schemas.openxmlformats.org/drawingml/2006/main">
             <a:pPr algn="l">
-              <a:defRPr sz="1500" b="0">
+              <a:defRPr sz="1725" b="0">
                 <a:solidFill>
                   <a:srgbClr val="17253A"/>
                 </a:solidFill>
@@ -8393,7 +8395,7 @@
               </a:defRPr>
             </a:pPr>
             <a:r>
-              <a:rPr sz="1500" b="0">
+              <a:rPr sz="1725" b="0">
                 <a:solidFill>
                   <a:srgbClr val="17253A"/>
                 </a:solidFill>
@@ -8401,7 +8403,7 @@
                 <a:ea typeface="Arial"/>
                 <a:cs typeface="Arial"/>
               </a:rPr>
-              <a:t>Identify the structure: Align digits by place value and include placeholder zeros.</a:t>
+              <a:t>3 × 2.375 km</a:t>
             </a:r>
           </a:p>
         </p:txBody>
@@ -8411,28 +8413,30 @@
           <p:cNvPr id="14" name="">
             <a:extLst xmlns:a="http://schemas.openxmlformats.org/drawingml/2006/main">
               <a:ext uri="{FF2B5EF4-FFF2-40B4-BE49-F238E27FC236}">
-                <a16:creationId xmlns:a16="http://schemas.microsoft.com/office/drawing/2014/main" id="{CD1A226C-3CA9-4B33-BB63-9A229249C893}"/>
-              </a:ext>
-            </a:extLst>
-          </p:cNvPr>
-          <p:cNvSpPr>
-            <a:spLocks xmlns:a="http://schemas.openxmlformats.org/drawingml/2006/main" noGrp="1"/>
-          </p:cNvSpPr>
-          <p:nvPr/>
-        </p:nvSpPr>
-        <p:spPr>
-          <a:xfrm xmlns:a="http://schemas.openxmlformats.org/drawingml/2006/main">
-            <a:off x="1000125" y="2990850"/>
-            <a:ext cx="476250" cy="476250"/>
-          </a:xfrm>
-          <a:prstGeom xmlns:a="http://schemas.openxmlformats.org/drawingml/2006/main" prst="ellipse">
+                <a16:creationId xmlns:a16="http://schemas.microsoft.com/office/drawing/2014/main" id="{8393A0DB-2B3A-4B18-9AD0-26F16B6FECB0}"/>
+              </a:ext>
+            </a:extLst>
+          </p:cNvPr>
+          <p:cNvSpPr>
+            <a:spLocks xmlns:a="http://schemas.openxmlformats.org/drawingml/2006/main" noGrp="1"/>
+          </p:cNvSpPr>
+          <p:nvPr/>
+        </p:nvSpPr>
+        <p:spPr>
+          <a:xfrm xmlns:a="http://schemas.openxmlformats.org/drawingml/2006/main">
+            <a:off x="1714500" y="2943225"/>
+            <a:ext cx="9334500" cy="9525"/>
+          </a:xfrm>
+          <a:prstGeom xmlns:a="http://schemas.openxmlformats.org/drawingml/2006/main" prst="rect">
             <a:avLst/>
           </a:prstGeom>
           <a:solidFill xmlns:a="http://schemas.openxmlformats.org/drawingml/2006/main">
-            <a:srgbClr val="2C6E73"/>
+            <a:srgbClr val="D9E0E6"/>
           </a:solidFill>
           <a:ln xmlns:a="http://schemas.openxmlformats.org/drawingml/2006/main" w="0">
-            <a:noFill/>
+            <a:solidFill>
+              <a:srgbClr val="D9E0E6"/>
+            </a:solidFill>
           </a:ln>
         </p:spPr>
       </p:sp>
@@ -8441,19 +8445,19 @@
           <p:cNvPr id="15" name="">
             <a:extLst xmlns:a="http://schemas.openxmlformats.org/drawingml/2006/main">
               <a:ext uri="{FF2B5EF4-FFF2-40B4-BE49-F238E27FC236}">
-                <a16:creationId xmlns:a16="http://schemas.microsoft.com/office/drawing/2014/main" id="{49651702-BF6F-48C1-AF4D-E6306CDCA1DF}"/>
-              </a:ext>
-            </a:extLst>
-          </p:cNvPr>
-          <p:cNvSpPr>
-            <a:spLocks xmlns:a="http://schemas.openxmlformats.org/drawingml/2006/main" noGrp="1"/>
-          </p:cNvSpPr>
-          <p:nvPr/>
-        </p:nvSpPr>
-        <p:spPr>
-          <a:xfrm xmlns:a="http://schemas.openxmlformats.org/drawingml/2006/main">
-            <a:off x="1000125" y="3019425"/>
-            <a:ext cx="476250" cy="419100"/>
+                <a16:creationId xmlns:a16="http://schemas.microsoft.com/office/drawing/2014/main" id="{FB475B66-55DA-4C96-BA86-7CE5F46CDE7B}"/>
+              </a:ext>
+            </a:extLst>
+          </p:cNvPr>
+          <p:cNvSpPr>
+            <a:spLocks xmlns:a="http://schemas.openxmlformats.org/drawingml/2006/main" noGrp="1"/>
+          </p:cNvSpPr>
+          <p:nvPr/>
+        </p:nvSpPr>
+        <p:spPr>
+          <a:xfrm xmlns:a="http://schemas.openxmlformats.org/drawingml/2006/main">
+            <a:off x="1162050" y="3076575"/>
+            <a:ext cx="400050" cy="400050"/>
           </a:xfrm>
           <a:prstGeom xmlns:a="http://schemas.openxmlformats.org/drawingml/2006/main" prst="rect">
             <a:avLst/>
@@ -8470,9 +8474,9 @@
           <a:lstStyle xmlns:a="http://schemas.openxmlformats.org/drawingml/2006/main"/>
           <a:p xmlns:a="http://schemas.openxmlformats.org/drawingml/2006/main">
             <a:pPr algn="ctr">
-              <a:defRPr sz="1350" b="1">
-                <a:solidFill>
-                  <a:srgbClr val="FFFFFF"/>
+              <a:defRPr sz="1125" b="1">
+                <a:solidFill>
+                  <a:srgbClr val="2C6E73"/>
                 </a:solidFill>
                 <a:latin typeface="Arial"/>
                 <a:ea typeface="Arial"/>
@@ -8480,9 +8484,9 @@
               </a:defRPr>
             </a:pPr>
             <a:r>
-              <a:rPr sz="1350" b="1">
-                <a:solidFill>
-                  <a:srgbClr val="FFFFFF"/>
+              <a:rPr sz="1125" b="1">
+                <a:solidFill>
+                  <a:srgbClr val="2C6E73"/>
                 </a:solidFill>
                 <a:latin typeface="Arial"/>
                 <a:ea typeface="Arial"/>
@@ -8498,19 +8502,19 @@
           <p:cNvPr id="16" name="">
             <a:extLst xmlns:a="http://schemas.openxmlformats.org/drawingml/2006/main">
               <a:ext uri="{FF2B5EF4-FFF2-40B4-BE49-F238E27FC236}">
-                <a16:creationId xmlns:a16="http://schemas.microsoft.com/office/drawing/2014/main" id="{7BC4AAFD-AA1E-4C8E-A45F-A1305CE591FD}"/>
-              </a:ext>
-            </a:extLst>
-          </p:cNvPr>
-          <p:cNvSpPr>
-            <a:spLocks xmlns:a="http://schemas.openxmlformats.org/drawingml/2006/main" noGrp="1"/>
-          </p:cNvSpPr>
-          <p:nvPr/>
-        </p:nvSpPr>
-        <p:spPr>
-          <a:xfrm xmlns:a="http://schemas.openxmlformats.org/drawingml/2006/main">
-            <a:off x="1714500" y="2924175"/>
-            <a:ext cx="9429750" cy="609600"/>
+                <a16:creationId xmlns:a16="http://schemas.microsoft.com/office/drawing/2014/main" id="{6E8D38E1-F6F7-49E8-8C9E-0A42C481188A}"/>
+              </a:ext>
+            </a:extLst>
+          </p:cNvPr>
+          <p:cNvSpPr>
+            <a:spLocks xmlns:a="http://schemas.openxmlformats.org/drawingml/2006/main" noGrp="1"/>
+          </p:cNvSpPr>
+          <p:nvPr/>
+        </p:nvSpPr>
+        <p:spPr>
+          <a:xfrm xmlns:a="http://schemas.openxmlformats.org/drawingml/2006/main">
+            <a:off x="1714500" y="2990850"/>
+            <a:ext cx="9525000" cy="809625"/>
           </a:xfrm>
           <a:prstGeom xmlns:a="http://schemas.openxmlformats.org/drawingml/2006/main" prst="rect">
             <a:avLst/>
@@ -8527,7 +8531,7 @@
           <a:lstStyle xmlns:a="http://schemas.openxmlformats.org/drawingml/2006/main"/>
           <a:p xmlns:a="http://schemas.openxmlformats.org/drawingml/2006/main">
             <a:pPr algn="l">
-              <a:defRPr sz="1500" b="0">
+              <a:defRPr sz="1725" b="0">
                 <a:solidFill>
                   <a:srgbClr val="17253A"/>
                 </a:solidFill>
@@ -8537,7 +8541,7 @@
               </a:defRPr>
             </a:pPr>
             <a:r>
-              <a:rPr sz="1500" b="0">
+              <a:rPr sz="1725" b="0">
                 <a:solidFill>
                   <a:srgbClr val="17253A"/>
                 </a:solidFill>
@@ -8545,7 +8549,7 @@
                 <a:ea typeface="Arial"/>
                 <a:cs typeface="Arial"/>
               </a:rPr>
-              <a:t>Set up the method: Calculate using the chosen mental or written method.</a:t>
+              <a:t>2.375 × 3 = 7.125 km</a:t>
             </a:r>
           </a:p>
         </p:txBody>
@@ -8555,28 +8559,30 @@
           <p:cNvPr id="17" name="">
             <a:extLst xmlns:a="http://schemas.openxmlformats.org/drawingml/2006/main">
               <a:ext uri="{FF2B5EF4-FFF2-40B4-BE49-F238E27FC236}">
-                <a16:creationId xmlns:a16="http://schemas.microsoft.com/office/drawing/2014/main" id="{157E111A-0A8E-4D17-94D0-A5AC549C771F}"/>
-              </a:ext>
-            </a:extLst>
-          </p:cNvPr>
-          <p:cNvSpPr>
-            <a:spLocks xmlns:a="http://schemas.openxmlformats.org/drawingml/2006/main" noGrp="1"/>
-          </p:cNvSpPr>
-          <p:nvPr/>
-        </p:nvSpPr>
-        <p:spPr>
-          <a:xfrm xmlns:a="http://schemas.openxmlformats.org/drawingml/2006/main">
-            <a:off x="1000125" y="3733800"/>
-            <a:ext cx="476250" cy="476250"/>
-          </a:xfrm>
-          <a:prstGeom xmlns:a="http://schemas.openxmlformats.org/drawingml/2006/main" prst="ellipse">
+                <a16:creationId xmlns:a16="http://schemas.microsoft.com/office/drawing/2014/main" id="{56D6E021-8515-44BB-9662-E48D44147EFF}"/>
+              </a:ext>
+            </a:extLst>
+          </p:cNvPr>
+          <p:cNvSpPr>
+            <a:spLocks xmlns:a="http://schemas.openxmlformats.org/drawingml/2006/main" noGrp="1"/>
+          </p:cNvSpPr>
+          <p:nvPr/>
+        </p:nvSpPr>
+        <p:spPr>
+          <a:xfrm xmlns:a="http://schemas.openxmlformats.org/drawingml/2006/main">
+            <a:off x="1714500" y="3819525"/>
+            <a:ext cx="9334500" cy="9525"/>
+          </a:xfrm>
+          <a:prstGeom xmlns:a="http://schemas.openxmlformats.org/drawingml/2006/main" prst="rect">
             <a:avLst/>
           </a:prstGeom>
           <a:solidFill xmlns:a="http://schemas.openxmlformats.org/drawingml/2006/main">
-            <a:srgbClr val="2C6E73"/>
+            <a:srgbClr val="D9E0E6"/>
           </a:solidFill>
           <a:ln xmlns:a="http://schemas.openxmlformats.org/drawingml/2006/main" w="0">
-            <a:noFill/>
+            <a:solidFill>
+              <a:srgbClr val="D9E0E6"/>
+            </a:solidFill>
           </a:ln>
         </p:spPr>
       </p:sp>
@@ -8585,19 +8591,19 @@
           <p:cNvPr id="18" name="">
             <a:extLst xmlns:a="http://schemas.openxmlformats.org/drawingml/2006/main">
               <a:ext uri="{FF2B5EF4-FFF2-40B4-BE49-F238E27FC236}">
-                <a16:creationId xmlns:a16="http://schemas.microsoft.com/office/drawing/2014/main" id="{E75681A9-2A62-4DD9-AC8F-72728289A44B}"/>
-              </a:ext>
-            </a:extLst>
-          </p:cNvPr>
-          <p:cNvSpPr>
-            <a:spLocks xmlns:a="http://schemas.openxmlformats.org/drawingml/2006/main" noGrp="1"/>
-          </p:cNvSpPr>
-          <p:nvPr/>
-        </p:nvSpPr>
-        <p:spPr>
-          <a:xfrm xmlns:a="http://schemas.openxmlformats.org/drawingml/2006/main">
-            <a:off x="1000125" y="3762375"/>
-            <a:ext cx="476250" cy="419100"/>
+                <a16:creationId xmlns:a16="http://schemas.microsoft.com/office/drawing/2014/main" id="{D8D3F414-452F-498B-9932-CAB22A06A8EC}"/>
+              </a:ext>
+            </a:extLst>
+          </p:cNvPr>
+          <p:cNvSpPr>
+            <a:spLocks xmlns:a="http://schemas.openxmlformats.org/drawingml/2006/main" noGrp="1"/>
+          </p:cNvSpPr>
+          <p:nvPr/>
+        </p:nvSpPr>
+        <p:spPr>
+          <a:xfrm xmlns:a="http://schemas.openxmlformats.org/drawingml/2006/main">
+            <a:off x="1162050" y="3952875"/>
+            <a:ext cx="400050" cy="400050"/>
           </a:xfrm>
           <a:prstGeom xmlns:a="http://schemas.openxmlformats.org/drawingml/2006/main" prst="rect">
             <a:avLst/>
@@ -8614,9 +8620,9 @@
           <a:lstStyle xmlns:a="http://schemas.openxmlformats.org/drawingml/2006/main"/>
           <a:p xmlns:a="http://schemas.openxmlformats.org/drawingml/2006/main">
             <a:pPr algn="ctr">
-              <a:defRPr sz="1350" b="1">
-                <a:solidFill>
-                  <a:srgbClr val="FFFFFF"/>
+              <a:defRPr sz="1125" b="1">
+                <a:solidFill>
+                  <a:srgbClr val="2C6E73"/>
                 </a:solidFill>
                 <a:latin typeface="Arial"/>
                 <a:ea typeface="Arial"/>
@@ -8624,9 +8630,9 @@
               </a:defRPr>
             </a:pPr>
             <a:r>
-              <a:rPr sz="1350" b="1">
-                <a:solidFill>
-                  <a:srgbClr val="FFFFFF"/>
+              <a:rPr sz="1125" b="1">
+                <a:solidFill>
+                  <a:srgbClr val="2C6E73"/>
                 </a:solidFill>
                 <a:latin typeface="Arial"/>
                 <a:ea typeface="Arial"/>
@@ -8642,19 +8648,19 @@
           <p:cNvPr id="19" name="">
             <a:extLst xmlns:a="http://schemas.openxmlformats.org/drawingml/2006/main">
               <a:ext uri="{FF2B5EF4-FFF2-40B4-BE49-F238E27FC236}">
-                <a16:creationId xmlns:a16="http://schemas.microsoft.com/office/drawing/2014/main" id="{5F53356E-639E-4447-A9F0-050D7282E2E3}"/>
-              </a:ext>
-            </a:extLst>
-          </p:cNvPr>
-          <p:cNvSpPr>
-            <a:spLocks xmlns:a="http://schemas.openxmlformats.org/drawingml/2006/main" noGrp="1"/>
-          </p:cNvSpPr>
-          <p:nvPr/>
-        </p:nvSpPr>
-        <p:spPr>
-          <a:xfrm xmlns:a="http://schemas.openxmlformats.org/drawingml/2006/main">
-            <a:off x="1714500" y="3667125"/>
-            <a:ext cx="9429750" cy="609600"/>
+                <a16:creationId xmlns:a16="http://schemas.microsoft.com/office/drawing/2014/main" id="{9E69A5D9-C10F-4E3B-A078-90E1159738F8}"/>
+              </a:ext>
+            </a:extLst>
+          </p:cNvPr>
+          <p:cNvSpPr>
+            <a:spLocks xmlns:a="http://schemas.openxmlformats.org/drawingml/2006/main" noGrp="1"/>
+          </p:cNvSpPr>
+          <p:nvPr/>
+        </p:nvSpPr>
+        <p:spPr>
+          <a:xfrm xmlns:a="http://schemas.openxmlformats.org/drawingml/2006/main">
+            <a:off x="1714500" y="3867150"/>
+            <a:ext cx="9525000" cy="809625"/>
           </a:xfrm>
           <a:prstGeom xmlns:a="http://schemas.openxmlformats.org/drawingml/2006/main" prst="rect">
             <a:avLst/>
@@ -8671,7 +8677,7 @@
           <a:lstStyle xmlns:a="http://schemas.openxmlformats.org/drawingml/2006/main"/>
           <a:p xmlns:a="http://schemas.openxmlformats.org/drawingml/2006/main">
             <a:pPr algn="l">
-              <a:defRPr sz="1500" b="0">
+              <a:defRPr sz="1725" b="0">
                 <a:solidFill>
                   <a:srgbClr val="17253A"/>
                 </a:solidFill>
@@ -8681,7 +8687,7 @@
               </a:defRPr>
             </a:pPr>
             <a:r>
-              <a:rPr sz="1500" b="0">
+              <a:rPr sz="1725" b="0">
                 <a:solidFill>
                   <a:srgbClr val="17253A"/>
                 </a:solidFill>
@@ -8689,7 +8695,7 @@
                 <a:ea typeface="Arial"/>
                 <a:cs typeface="Arial"/>
               </a:rPr>
-              <a:t>Complete the calculation: 8.975 km.</a:t>
+              <a:t>7.125 + 1.850</a:t>
             </a:r>
           </a:p>
         </p:txBody>
@@ -8699,28 +8705,30 @@
           <p:cNvPr id="20" name="">
             <a:extLst xmlns:a="http://schemas.openxmlformats.org/drawingml/2006/main">
               <a:ext uri="{FF2B5EF4-FFF2-40B4-BE49-F238E27FC236}">
-                <a16:creationId xmlns:a16="http://schemas.microsoft.com/office/drawing/2014/main" id="{D7C530AB-15F4-4635-9E6A-0FDA0538A49A}"/>
-              </a:ext>
-            </a:extLst>
-          </p:cNvPr>
-          <p:cNvSpPr>
-            <a:spLocks xmlns:a="http://schemas.openxmlformats.org/drawingml/2006/main" noGrp="1"/>
-          </p:cNvSpPr>
-          <p:nvPr/>
-        </p:nvSpPr>
-        <p:spPr>
-          <a:xfrm xmlns:a="http://schemas.openxmlformats.org/drawingml/2006/main">
-            <a:off x="1000125" y="4476750"/>
-            <a:ext cx="476250" cy="476250"/>
-          </a:xfrm>
-          <a:prstGeom xmlns:a="http://schemas.openxmlformats.org/drawingml/2006/main" prst="ellipse">
+                <a16:creationId xmlns:a16="http://schemas.microsoft.com/office/drawing/2014/main" id="{76521504-A507-4670-8464-FEB9DEB4CC32}"/>
+              </a:ext>
+            </a:extLst>
+          </p:cNvPr>
+          <p:cNvSpPr>
+            <a:spLocks xmlns:a="http://schemas.openxmlformats.org/drawingml/2006/main" noGrp="1"/>
+          </p:cNvSpPr>
+          <p:nvPr/>
+        </p:nvSpPr>
+        <p:spPr>
+          <a:xfrm xmlns:a="http://schemas.openxmlformats.org/drawingml/2006/main">
+            <a:off x="1714500" y="4695825"/>
+            <a:ext cx="9334500" cy="9525"/>
+          </a:xfrm>
+          <a:prstGeom xmlns:a="http://schemas.openxmlformats.org/drawingml/2006/main" prst="rect">
             <a:avLst/>
           </a:prstGeom>
           <a:solidFill xmlns:a="http://schemas.openxmlformats.org/drawingml/2006/main">
-            <a:srgbClr val="2C6E73"/>
+            <a:srgbClr val="D9E0E6"/>
           </a:solidFill>
           <a:ln xmlns:a="http://schemas.openxmlformats.org/drawingml/2006/main" w="0">
-            <a:noFill/>
+            <a:solidFill>
+              <a:srgbClr val="D9E0E6"/>
+            </a:solidFill>
           </a:ln>
         </p:spPr>
       </p:sp>
@@ -8729,19 +8737,19 @@
           <p:cNvPr id="21" name="">
             <a:extLst xmlns:a="http://schemas.openxmlformats.org/drawingml/2006/main">
               <a:ext uri="{FF2B5EF4-FFF2-40B4-BE49-F238E27FC236}">
-                <a16:creationId xmlns:a16="http://schemas.microsoft.com/office/drawing/2014/main" id="{B4E4B4E6-6182-4745-8592-7D04E914840E}"/>
-              </a:ext>
-            </a:extLst>
-          </p:cNvPr>
-          <p:cNvSpPr>
-            <a:spLocks xmlns:a="http://schemas.openxmlformats.org/drawingml/2006/main" noGrp="1"/>
-          </p:cNvSpPr>
-          <p:nvPr/>
-        </p:nvSpPr>
-        <p:spPr>
-          <a:xfrm xmlns:a="http://schemas.openxmlformats.org/drawingml/2006/main">
-            <a:off x="1000125" y="4505325"/>
-            <a:ext cx="476250" cy="419100"/>
+                <a16:creationId xmlns:a16="http://schemas.microsoft.com/office/drawing/2014/main" id="{436E908A-7EBB-42C4-889B-2627EACC4936}"/>
+              </a:ext>
+            </a:extLst>
+          </p:cNvPr>
+          <p:cNvSpPr>
+            <a:spLocks xmlns:a="http://schemas.openxmlformats.org/drawingml/2006/main" noGrp="1"/>
+          </p:cNvSpPr>
+          <p:nvPr/>
+        </p:nvSpPr>
+        <p:spPr>
+          <a:xfrm xmlns:a="http://schemas.openxmlformats.org/drawingml/2006/main">
+            <a:off x="1162050" y="4829175"/>
+            <a:ext cx="400050" cy="400050"/>
           </a:xfrm>
           <a:prstGeom xmlns:a="http://schemas.openxmlformats.org/drawingml/2006/main" prst="rect">
             <a:avLst/>
@@ -8758,9 +8766,9 @@
           <a:lstStyle xmlns:a="http://schemas.openxmlformats.org/drawingml/2006/main"/>
           <a:p xmlns:a="http://schemas.openxmlformats.org/drawingml/2006/main">
             <a:pPr algn="ctr">
-              <a:defRPr sz="1350" b="1">
-                <a:solidFill>
-                  <a:srgbClr val="FFFFFF"/>
+              <a:defRPr sz="1125" b="1">
+                <a:solidFill>
+                  <a:srgbClr val="2F785D"/>
                 </a:solidFill>
                 <a:latin typeface="Arial"/>
                 <a:ea typeface="Arial"/>
@@ -8768,9 +8776,9 @@
               </a:defRPr>
             </a:pPr>
             <a:r>
-              <a:rPr sz="1350" b="1">
-                <a:solidFill>
-                  <a:srgbClr val="FFFFFF"/>
+              <a:rPr sz="1125" b="1">
+                <a:solidFill>
+                  <a:srgbClr val="2F785D"/>
                 </a:solidFill>
                 <a:latin typeface="Arial"/>
                 <a:ea typeface="Arial"/>
@@ -8786,19 +8794,19 @@
           <p:cNvPr id="22" name="">
             <a:extLst xmlns:a="http://schemas.openxmlformats.org/drawingml/2006/main">
               <a:ext uri="{FF2B5EF4-FFF2-40B4-BE49-F238E27FC236}">
-                <a16:creationId xmlns:a16="http://schemas.microsoft.com/office/drawing/2014/main" id="{E2766DFC-94B9-4413-B342-16FE697906D0}"/>
-              </a:ext>
-            </a:extLst>
-          </p:cNvPr>
-          <p:cNvSpPr>
-            <a:spLocks xmlns:a="http://schemas.openxmlformats.org/drawingml/2006/main" noGrp="1"/>
-          </p:cNvSpPr>
-          <p:nvPr/>
-        </p:nvSpPr>
-        <p:spPr>
-          <a:xfrm xmlns:a="http://schemas.openxmlformats.org/drawingml/2006/main">
-            <a:off x="1714500" y="4410075"/>
-            <a:ext cx="9429750" cy="609600"/>
+                <a16:creationId xmlns:a16="http://schemas.microsoft.com/office/drawing/2014/main" id="{E993D380-2510-4096-A15F-B2BEDC480937}"/>
+              </a:ext>
+            </a:extLst>
+          </p:cNvPr>
+          <p:cNvSpPr>
+            <a:spLocks xmlns:a="http://schemas.openxmlformats.org/drawingml/2006/main" noGrp="1"/>
+          </p:cNvSpPr>
+          <p:nvPr/>
+        </p:nvSpPr>
+        <p:spPr>
+          <a:xfrm xmlns:a="http://schemas.openxmlformats.org/drawingml/2006/main">
+            <a:off x="1714500" y="4743450"/>
+            <a:ext cx="9525000" cy="809625"/>
           </a:xfrm>
           <a:prstGeom xmlns:a="http://schemas.openxmlformats.org/drawingml/2006/main" prst="rect">
             <a:avLst/>
@@ -8815,7 +8823,7 @@
           <a:lstStyle xmlns:a="http://schemas.openxmlformats.org/drawingml/2006/main"/>
           <a:p xmlns:a="http://schemas.openxmlformats.org/drawingml/2006/main">
             <a:pPr algn="l">
-              <a:defRPr sz="1500" b="1">
+              <a:defRPr sz="1725" b="1">
                 <a:solidFill>
                   <a:srgbClr val="2F785D"/>
                 </a:solidFill>
@@ -8825,7 +8833,7 @@
               </a:defRPr>
             </a:pPr>
             <a:r>
-              <a:rPr sz="1500" b="1">
+              <a:rPr sz="1725" b="1">
                 <a:solidFill>
                   <a:srgbClr val="2F785D"/>
                 </a:solidFill>
@@ -8833,7 +8841,7 @@
                 <a:ea typeface="Arial"/>
                 <a:cs typeface="Arial"/>
               </a:rPr>
-              <a:t>Check the result: Estimate and check that the decimal point is reasonable.</a:t>
+              <a:t>8.975 km</a:t>
             </a:r>
           </a:p>
         </p:txBody>
@@ -8841,7 +8849,7 @@
     </p:spTree>
     <p:extLst>
       <p:ext uri="{BB962C8B-B14F-4D97-AF65-F5344CB8AC3E}">
-        <p14:creationId xmlns:p14="http://schemas.microsoft.com/office/powerpoint/2010/main" val="1693772609"/>
+        <p14:creationId xmlns:p14="http://schemas.microsoft.com/office/powerpoint/2010/main" val="988134527"/>
       </p:ext>
     </p:extLst>
   </p:cSld>
@@ -9134,7 +9142,7 @@
           <p:cNvPr id="15" name="">
             <a:extLst xmlns:a="http://schemas.openxmlformats.org/drawingml/2006/main">
               <a:ext uri="{FF2B5EF4-FFF2-40B4-BE49-F238E27FC236}">
-                <a16:creationId xmlns:a16="http://schemas.microsoft.com/office/drawing/2014/main" id="{4E52CFDA-D2A5-40B2-BF7A-FD4E415F267E}"/>
+                <a16:creationId xmlns:a16="http://schemas.microsoft.com/office/drawing/2014/main" id="{EBFDAE2B-1084-4C78-B14C-759238900213}"/>
               </a:ext>
             </a:extLst>
           </p:cNvPr>
@@ -9166,7 +9174,7 @@
           <p:cNvPr id="2" name="">
             <a:extLst xmlns:a="http://schemas.openxmlformats.org/drawingml/2006/main">
               <a:ext uri="{FF2B5EF4-FFF2-40B4-BE49-F238E27FC236}">
-                <a16:creationId xmlns:a16="http://schemas.microsoft.com/office/drawing/2014/main" id="{0AE19C48-AF9F-43FA-A89F-D02E8556BB2D}"/>
+                <a16:creationId xmlns:a16="http://schemas.microsoft.com/office/drawing/2014/main" id="{6C54D7AA-BAE7-44CC-BFAD-3B5847BB1C7B}"/>
               </a:ext>
             </a:extLst>
           </p:cNvPr>
@@ -9223,7 +9231,7 @@
           <p:cNvPr id="3" name="">
             <a:extLst xmlns:a="http://schemas.openxmlformats.org/drawingml/2006/main">
               <a:ext uri="{FF2B5EF4-FFF2-40B4-BE49-F238E27FC236}">
-                <a16:creationId xmlns:a16="http://schemas.microsoft.com/office/drawing/2014/main" id="{AC02A9B7-4C9F-41AE-B08B-B53BB1E6B64D}"/>
+                <a16:creationId xmlns:a16="http://schemas.microsoft.com/office/drawing/2014/main" id="{CD4906B4-54B6-4A53-BFA2-FF65E30197C7}"/>
               </a:ext>
             </a:extLst>
           </p:cNvPr>
@@ -9255,7 +9263,7 @@
           <p:cNvPr id="4" name="">
             <a:extLst xmlns:a="http://schemas.openxmlformats.org/drawingml/2006/main">
               <a:ext uri="{FF2B5EF4-FFF2-40B4-BE49-F238E27FC236}">
-                <a16:creationId xmlns:a16="http://schemas.microsoft.com/office/drawing/2014/main" id="{A0208AAA-0CBD-4AB9-8EB1-0A507B2BD9DD}"/>
+                <a16:creationId xmlns:a16="http://schemas.microsoft.com/office/drawing/2014/main" id="{5B786D2E-1013-47AE-A961-5A3F447EB828}"/>
               </a:ext>
             </a:extLst>
           </p:cNvPr>
@@ -9312,7 +9320,7 @@
           <p:cNvPr id="5" name="">
             <a:extLst xmlns:a="http://schemas.openxmlformats.org/drawingml/2006/main">
               <a:ext uri="{FF2B5EF4-FFF2-40B4-BE49-F238E27FC236}">
-                <a16:creationId xmlns:a16="http://schemas.microsoft.com/office/drawing/2014/main" id="{B5A4CEBC-0373-4602-A8C5-B3B706C26B76}"/>
+                <a16:creationId xmlns:a16="http://schemas.microsoft.com/office/drawing/2014/main" id="{D1B4F799-3B0C-48A3-A475-0CE48DE8616E}"/>
               </a:ext>
             </a:extLst>
           </p:cNvPr>
@@ -9369,7 +9377,7 @@
           <p:cNvPr id="6" name="">
             <a:extLst xmlns:a="http://schemas.openxmlformats.org/drawingml/2006/main">
               <a:ext uri="{FF2B5EF4-FFF2-40B4-BE49-F238E27FC236}">
-                <a16:creationId xmlns:a16="http://schemas.microsoft.com/office/drawing/2014/main" id="{EAC56B1A-CCF2-46EF-99F4-ED8AD0A9B51F}"/>
+                <a16:creationId xmlns:a16="http://schemas.microsoft.com/office/drawing/2014/main" id="{F5B4E841-C1E3-4726-9B3F-5B51A26FA613}"/>
               </a:ext>
             </a:extLst>
           </p:cNvPr>
@@ -9426,7 +9434,7 @@
           <p:cNvPr id="7" name="">
             <a:extLst xmlns:a="http://schemas.openxmlformats.org/drawingml/2006/main">
               <a:ext uri="{FF2B5EF4-FFF2-40B4-BE49-F238E27FC236}">
-                <a16:creationId xmlns:a16="http://schemas.microsoft.com/office/drawing/2014/main" id="{49B54C0C-9238-4222-A2D5-C727948C9AD3}"/>
+                <a16:creationId xmlns:a16="http://schemas.microsoft.com/office/drawing/2014/main" id="{D46D7E20-C105-4E0C-BCEB-710DA9132A05}"/>
               </a:ext>
             </a:extLst>
           </p:cNvPr>
@@ -9458,7 +9466,7 @@
           <p:cNvPr id="8" name="">
             <a:extLst xmlns:a="http://schemas.openxmlformats.org/drawingml/2006/main">
               <a:ext uri="{FF2B5EF4-FFF2-40B4-BE49-F238E27FC236}">
-                <a16:creationId xmlns:a16="http://schemas.microsoft.com/office/drawing/2014/main" id="{A23A48E4-67BC-4B99-AF41-6AE9CEB84545}"/>
+                <a16:creationId xmlns:a16="http://schemas.microsoft.com/office/drawing/2014/main" id="{387A324B-4AC0-40EA-BE59-B42520208894}"/>
               </a:ext>
             </a:extLst>
           </p:cNvPr>
@@ -9515,7 +9523,7 @@
           <p:cNvPr id="9" name="">
             <a:extLst xmlns:a="http://schemas.openxmlformats.org/drawingml/2006/main">
               <a:ext uri="{FF2B5EF4-FFF2-40B4-BE49-F238E27FC236}">
-                <a16:creationId xmlns:a16="http://schemas.microsoft.com/office/drawing/2014/main" id="{ED51A4DB-07C2-4CEE-BE61-051E87B9BF28}"/>
+                <a16:creationId xmlns:a16="http://schemas.microsoft.com/office/drawing/2014/main" id="{ED8FD885-FD0C-47C9-90E6-1A56AE44BEB8}"/>
               </a:ext>
             </a:extLst>
           </p:cNvPr>
@@ -9572,7 +9580,7 @@
           <p:cNvPr id="10" name="">
             <a:extLst xmlns:a="http://schemas.openxmlformats.org/drawingml/2006/main">
               <a:ext uri="{FF2B5EF4-FFF2-40B4-BE49-F238E27FC236}">
-                <a16:creationId xmlns:a16="http://schemas.microsoft.com/office/drawing/2014/main" id="{99C743A1-611C-4D88-B966-7AB4E4CA9E6F}"/>
+                <a16:creationId xmlns:a16="http://schemas.microsoft.com/office/drawing/2014/main" id="{D11282C7-1476-41A8-9DCD-CBEC5BDCCB9E}"/>
               </a:ext>
             </a:extLst>
           </p:cNvPr>
@@ -9629,7 +9637,7 @@
           <p:cNvPr id="11" name="">
             <a:extLst xmlns:a="http://schemas.openxmlformats.org/drawingml/2006/main">
               <a:ext uri="{FF2B5EF4-FFF2-40B4-BE49-F238E27FC236}">
-                <a16:creationId xmlns:a16="http://schemas.microsoft.com/office/drawing/2014/main" id="{28CA12D2-D307-4A48-9069-BED118D7277C}"/>
+                <a16:creationId xmlns:a16="http://schemas.microsoft.com/office/drawing/2014/main" id="{04439D1F-0292-4243-998D-CF9D9D81FDC6}"/>
               </a:ext>
             </a:extLst>
           </p:cNvPr>
@@ -9686,7 +9694,7 @@
           <p:cNvPr id="12" name="">
             <a:extLst xmlns:a="http://schemas.openxmlformats.org/drawingml/2006/main">
               <a:ext uri="{FF2B5EF4-FFF2-40B4-BE49-F238E27FC236}">
-                <a16:creationId xmlns:a16="http://schemas.microsoft.com/office/drawing/2014/main" id="{F258A173-46B3-4079-A706-2BF5AD92E8DE}"/>
+                <a16:creationId xmlns:a16="http://schemas.microsoft.com/office/drawing/2014/main" id="{2C4011C7-A6D3-4997-9B3B-225B5687A9BF}"/>
               </a:ext>
             </a:extLst>
           </p:cNvPr>
@@ -9718,7 +9726,7 @@
           <p:cNvPr id="13" name="">
             <a:extLst xmlns:a="http://schemas.openxmlformats.org/drawingml/2006/main">
               <a:ext uri="{FF2B5EF4-FFF2-40B4-BE49-F238E27FC236}">
-                <a16:creationId xmlns:a16="http://schemas.microsoft.com/office/drawing/2014/main" id="{119D1B29-DD45-4C7F-A3F4-15DAFA4CCE11}"/>
+                <a16:creationId xmlns:a16="http://schemas.microsoft.com/office/drawing/2014/main" id="{4838FAAC-FCF1-4F05-91F1-D45BB539E375}"/>
               </a:ext>
             </a:extLst>
           </p:cNvPr>
@@ -9775,7 +9783,7 @@
           <p:cNvPr id="14" name="">
             <a:extLst xmlns:a="http://schemas.openxmlformats.org/drawingml/2006/main">
               <a:ext uri="{FF2B5EF4-FFF2-40B4-BE49-F238E27FC236}">
-                <a16:creationId xmlns:a16="http://schemas.microsoft.com/office/drawing/2014/main" id="{933D7F8C-C408-4338-89D6-22011F7C8DA9}"/>
+                <a16:creationId xmlns:a16="http://schemas.microsoft.com/office/drawing/2014/main" id="{61B5802A-BE56-4F35-B3D3-2E5F39BCBA2D}"/>
               </a:ext>
             </a:extLst>
           </p:cNvPr>
@@ -9830,7 +9838,7 @@
     </p:spTree>
     <p:extLst>
       <p:ext uri="{BB962C8B-B14F-4D97-AF65-F5344CB8AC3E}">
-        <p14:creationId xmlns:p14="http://schemas.microsoft.com/office/powerpoint/2010/main" val="91478236"/>
+        <p14:creationId xmlns:p14="http://schemas.microsoft.com/office/powerpoint/2010/main" val="1149683313"/>
       </p:ext>
     </p:extLst>
   </p:cSld>
@@ -10031,7 +10039,7 @@
           <p:cNvPr id="16" name="">
             <a:extLst xmlns:a="http://schemas.openxmlformats.org/drawingml/2006/main">
               <a:ext uri="{FF2B5EF4-FFF2-40B4-BE49-F238E27FC236}">
-                <a16:creationId xmlns:a16="http://schemas.microsoft.com/office/drawing/2014/main" id="{C5CF1599-E0DA-470D-B25F-4D3A61041166}"/>
+                <a16:creationId xmlns:a16="http://schemas.microsoft.com/office/drawing/2014/main" id="{CEB2DBDA-F336-488D-8DE0-3FE8EC34FB18}"/>
               </a:ext>
             </a:extLst>
           </p:cNvPr>
@@ -10063,7 +10071,7 @@
           <p:cNvPr id="2" name="">
             <a:extLst xmlns:a="http://schemas.openxmlformats.org/drawingml/2006/main">
               <a:ext uri="{FF2B5EF4-FFF2-40B4-BE49-F238E27FC236}">
-                <a16:creationId xmlns:a16="http://schemas.microsoft.com/office/drawing/2014/main" id="{593F4A71-A135-48F2-AD67-BB4AB3D3FECF}"/>
+                <a16:creationId xmlns:a16="http://schemas.microsoft.com/office/drawing/2014/main" id="{3FF98464-E835-4820-9C37-1CFAB0C20836}"/>
               </a:ext>
             </a:extLst>
           </p:cNvPr>
@@ -10120,7 +10128,7 @@
           <p:cNvPr id="3" name="">
             <a:extLst xmlns:a="http://schemas.openxmlformats.org/drawingml/2006/main">
               <a:ext uri="{FF2B5EF4-FFF2-40B4-BE49-F238E27FC236}">
-                <a16:creationId xmlns:a16="http://schemas.microsoft.com/office/drawing/2014/main" id="{7EBBA559-1928-4842-8688-BB763E8AB9A1}"/>
+                <a16:creationId xmlns:a16="http://schemas.microsoft.com/office/drawing/2014/main" id="{03811D38-E32D-4829-9881-CE653227CFCC}"/>
               </a:ext>
             </a:extLst>
           </p:cNvPr>
@@ -10152,7 +10160,7 @@
           <p:cNvPr id="4" name="">
             <a:extLst xmlns:a="http://schemas.openxmlformats.org/drawingml/2006/main">
               <a:ext uri="{FF2B5EF4-FFF2-40B4-BE49-F238E27FC236}">
-                <a16:creationId xmlns:a16="http://schemas.microsoft.com/office/drawing/2014/main" id="{2DF8DCF6-1794-40CE-9A06-0592A75A3195}"/>
+                <a16:creationId xmlns:a16="http://schemas.microsoft.com/office/drawing/2014/main" id="{0A91D572-1246-43E1-A3E1-399537F67996}"/>
               </a:ext>
             </a:extLst>
           </p:cNvPr>
@@ -10209,7 +10217,7 @@
           <p:cNvPr id="5" name="">
             <a:extLst xmlns:a="http://schemas.openxmlformats.org/drawingml/2006/main">
               <a:ext uri="{FF2B5EF4-FFF2-40B4-BE49-F238E27FC236}">
-                <a16:creationId xmlns:a16="http://schemas.microsoft.com/office/drawing/2014/main" id="{70931D19-A567-4609-9DA7-CA0F48D1E652}"/>
+                <a16:creationId xmlns:a16="http://schemas.microsoft.com/office/drawing/2014/main" id="{CDE76B8E-06A6-40DD-90CE-09D7A4770A69}"/>
               </a:ext>
             </a:extLst>
           </p:cNvPr>
@@ -10266,7 +10274,7 @@
           <p:cNvPr id="6" name="">
             <a:extLst xmlns:a="http://schemas.openxmlformats.org/drawingml/2006/main">
               <a:ext uri="{FF2B5EF4-FFF2-40B4-BE49-F238E27FC236}">
-                <a16:creationId xmlns:a16="http://schemas.microsoft.com/office/drawing/2014/main" id="{DFC3A8CD-F5D9-41D5-88F8-1C2C3C60CDF5}"/>
+                <a16:creationId xmlns:a16="http://schemas.microsoft.com/office/drawing/2014/main" id="{85CEA110-7353-4D24-89B2-DA3E9BFCDF57}"/>
               </a:ext>
             </a:extLst>
           </p:cNvPr>
@@ -10323,7 +10331,7 @@
           <p:cNvPr id="7" name="">
             <a:extLst xmlns:a="http://schemas.openxmlformats.org/drawingml/2006/main">
               <a:ext uri="{FF2B5EF4-FFF2-40B4-BE49-F238E27FC236}">
-                <a16:creationId xmlns:a16="http://schemas.microsoft.com/office/drawing/2014/main" id="{D9E309F9-02A4-445E-A9D1-3C6B23DE835E}"/>
+                <a16:creationId xmlns:a16="http://schemas.microsoft.com/office/drawing/2014/main" id="{C8F671E2-5370-4367-8529-3905B86BE89D}"/>
               </a:ext>
             </a:extLst>
           </p:cNvPr>
@@ -10355,7 +10363,7 @@
           <p:cNvPr id="8" name="">
             <a:extLst xmlns:a="http://schemas.openxmlformats.org/drawingml/2006/main">
               <a:ext uri="{FF2B5EF4-FFF2-40B4-BE49-F238E27FC236}">
-                <a16:creationId xmlns:a16="http://schemas.microsoft.com/office/drawing/2014/main" id="{9BA1FB4E-D342-424C-AC38-AFF12431767F}"/>
+                <a16:creationId xmlns:a16="http://schemas.microsoft.com/office/drawing/2014/main" id="{F39BA03B-938B-4052-B767-7AE8D658A6DF}"/>
               </a:ext>
             </a:extLst>
           </p:cNvPr>
@@ -10412,7 +10420,7 @@
           <p:cNvPr id="9" name="">
             <a:extLst xmlns:a="http://schemas.openxmlformats.org/drawingml/2006/main">
               <a:ext uri="{FF2B5EF4-FFF2-40B4-BE49-F238E27FC236}">
-                <a16:creationId xmlns:a16="http://schemas.microsoft.com/office/drawing/2014/main" id="{63D0F817-452B-43FB-9284-D7704CA0DBED}"/>
+                <a16:creationId xmlns:a16="http://schemas.microsoft.com/office/drawing/2014/main" id="{6791B6B4-515C-4B56-971A-E036008B12F9}"/>
               </a:ext>
             </a:extLst>
           </p:cNvPr>
@@ -10469,7 +10477,7 @@
           <p:cNvPr id="10" name="">
             <a:extLst xmlns:a="http://schemas.openxmlformats.org/drawingml/2006/main">
               <a:ext uri="{FF2B5EF4-FFF2-40B4-BE49-F238E27FC236}">
-                <a16:creationId xmlns:a16="http://schemas.microsoft.com/office/drawing/2014/main" id="{76DB8635-EC12-40B8-8810-7EB3BEC83D61}"/>
+                <a16:creationId xmlns:a16="http://schemas.microsoft.com/office/drawing/2014/main" id="{7F6D6D3C-F526-4A82-84A2-D60CCA577C21}"/>
               </a:ext>
             </a:extLst>
           </p:cNvPr>
@@ -10526,7 +10534,7 @@
           <p:cNvPr id="11" name="">
             <a:extLst xmlns:a="http://schemas.openxmlformats.org/drawingml/2006/main">
               <a:ext uri="{FF2B5EF4-FFF2-40B4-BE49-F238E27FC236}">
-                <a16:creationId xmlns:a16="http://schemas.microsoft.com/office/drawing/2014/main" id="{FAEE5B03-2C40-40AD-81A4-AE756831E788}"/>
+                <a16:creationId xmlns:a16="http://schemas.microsoft.com/office/drawing/2014/main" id="{DF86B9B3-FA4C-4FB0-924F-B1DE7F7C188F}"/>
               </a:ext>
             </a:extLst>
           </p:cNvPr>
@@ -10583,7 +10591,7 @@
           <p:cNvPr id="12" name="">
             <a:extLst xmlns:a="http://schemas.openxmlformats.org/drawingml/2006/main">
               <a:ext uri="{FF2B5EF4-FFF2-40B4-BE49-F238E27FC236}">
-                <a16:creationId xmlns:a16="http://schemas.microsoft.com/office/drawing/2014/main" id="{D0B42E55-0883-4EDD-8CC2-5AC91670EA4C}"/>
+                <a16:creationId xmlns:a16="http://schemas.microsoft.com/office/drawing/2014/main" id="{66AA8FB3-3695-452C-A24B-23523AFDAA3F}"/>
               </a:ext>
             </a:extLst>
           </p:cNvPr>
@@ -10640,7 +10648,7 @@
           <p:cNvPr id="13" name="">
             <a:extLst xmlns:a="http://schemas.openxmlformats.org/drawingml/2006/main">
               <a:ext uri="{FF2B5EF4-FFF2-40B4-BE49-F238E27FC236}">
-                <a16:creationId xmlns:a16="http://schemas.microsoft.com/office/drawing/2014/main" id="{57D9237B-E301-4C0E-9271-6681F05DD5FF}"/>
+                <a16:creationId xmlns:a16="http://schemas.microsoft.com/office/drawing/2014/main" id="{AAC59284-32CF-473F-999D-95D07F6B9229}"/>
               </a:ext>
             </a:extLst>
           </p:cNvPr>
@@ -10697,7 +10705,7 @@
           <p:cNvPr id="14" name="">
             <a:extLst xmlns:a="http://schemas.openxmlformats.org/drawingml/2006/main">
               <a:ext uri="{FF2B5EF4-FFF2-40B4-BE49-F238E27FC236}">
-                <a16:creationId xmlns:a16="http://schemas.microsoft.com/office/drawing/2014/main" id="{34E8999F-15C4-47A9-AD97-72D61D16900E}"/>
+                <a16:creationId xmlns:a16="http://schemas.microsoft.com/office/drawing/2014/main" id="{8BC6EBCE-6E95-49E6-B599-D3E601EC842C}"/>
               </a:ext>
             </a:extLst>
           </p:cNvPr>
@@ -10754,7 +10762,7 @@
           <p:cNvPr id="15" name="">
             <a:extLst xmlns:a="http://schemas.openxmlformats.org/drawingml/2006/main">
               <a:ext uri="{FF2B5EF4-FFF2-40B4-BE49-F238E27FC236}">
-                <a16:creationId xmlns:a16="http://schemas.microsoft.com/office/drawing/2014/main" id="{DA1635CD-DC6B-472D-AAF3-3CBCCA9CEC90}"/>
+                <a16:creationId xmlns:a16="http://schemas.microsoft.com/office/drawing/2014/main" id="{093BF9EC-3C18-4894-A235-0D3E5935397E}"/>
               </a:ext>
             </a:extLst>
           </p:cNvPr>
@@ -10809,7 +10817,7 @@
     </p:spTree>
     <p:extLst>
       <p:ext uri="{BB962C8B-B14F-4D97-AF65-F5344CB8AC3E}">
-        <p14:creationId xmlns:p14="http://schemas.microsoft.com/office/powerpoint/2010/main" val="911611055"/>
+        <p14:creationId xmlns:p14="http://schemas.microsoft.com/office/powerpoint/2010/main" val="1270598763"/>
       </p:ext>
     </p:extLst>
   </p:cSld>
@@ -10964,7 +10972,7 @@
           <p:cNvPr id="16" name="">
             <a:extLst xmlns:a="http://schemas.openxmlformats.org/drawingml/2006/main">
               <a:ext uri="{FF2B5EF4-FFF2-40B4-BE49-F238E27FC236}">
-                <a16:creationId xmlns:a16="http://schemas.microsoft.com/office/drawing/2014/main" id="{6628267E-8CFF-4DAE-B859-38EE76EAB272}"/>
+                <a16:creationId xmlns:a16="http://schemas.microsoft.com/office/drawing/2014/main" id="{026A27F2-3F37-4C82-9550-0BC584D3AC06}"/>
               </a:ext>
             </a:extLst>
           </p:cNvPr>
@@ -10996,7 +11004,7 @@
           <p:cNvPr id="2" name="">
             <a:extLst xmlns:a="http://schemas.openxmlformats.org/drawingml/2006/main">
               <a:ext uri="{FF2B5EF4-FFF2-40B4-BE49-F238E27FC236}">
-                <a16:creationId xmlns:a16="http://schemas.microsoft.com/office/drawing/2014/main" id="{636D5A4A-0075-4120-B26A-4E2030CD6A27}"/>
+                <a16:creationId xmlns:a16="http://schemas.microsoft.com/office/drawing/2014/main" id="{D3D77FAE-8619-4384-B1A7-F4C6D828340F}"/>
               </a:ext>
             </a:extLst>
           </p:cNvPr>
@@ -11053,7 +11061,7 @@
           <p:cNvPr id="3" name="">
             <a:extLst xmlns:a="http://schemas.openxmlformats.org/drawingml/2006/main">
               <a:ext uri="{FF2B5EF4-FFF2-40B4-BE49-F238E27FC236}">
-                <a16:creationId xmlns:a16="http://schemas.microsoft.com/office/drawing/2014/main" id="{1E5D842D-9EF0-44AA-8448-903DD225CAB7}"/>
+                <a16:creationId xmlns:a16="http://schemas.microsoft.com/office/drawing/2014/main" id="{F187EB2C-4E30-46F3-8D7C-1D7308EC5C81}"/>
               </a:ext>
             </a:extLst>
           </p:cNvPr>
@@ -11085,7 +11093,7 @@
           <p:cNvPr id="4" name="">
             <a:extLst xmlns:a="http://schemas.openxmlformats.org/drawingml/2006/main">
               <a:ext uri="{FF2B5EF4-FFF2-40B4-BE49-F238E27FC236}">
-                <a16:creationId xmlns:a16="http://schemas.microsoft.com/office/drawing/2014/main" id="{E5252E37-909E-4357-9457-BBD13ED8ACE9}"/>
+                <a16:creationId xmlns:a16="http://schemas.microsoft.com/office/drawing/2014/main" id="{A064D02A-36B5-4AAB-BD78-7C62FBEE70EE}"/>
               </a:ext>
             </a:extLst>
           </p:cNvPr>
@@ -11142,7 +11150,7 @@
           <p:cNvPr id="5" name="">
             <a:extLst xmlns:a="http://schemas.openxmlformats.org/drawingml/2006/main">
               <a:ext uri="{FF2B5EF4-FFF2-40B4-BE49-F238E27FC236}">
-                <a16:creationId xmlns:a16="http://schemas.microsoft.com/office/drawing/2014/main" id="{ADE01B24-F4FC-4A17-9261-0436DFCD44B5}"/>
+                <a16:creationId xmlns:a16="http://schemas.microsoft.com/office/drawing/2014/main" id="{629660E8-DFAA-4355-BEB7-624D1012D85B}"/>
               </a:ext>
             </a:extLst>
           </p:cNvPr>
@@ -11199,7 +11207,7 @@
           <p:cNvPr id="6" name="">
             <a:extLst xmlns:a="http://schemas.openxmlformats.org/drawingml/2006/main">
               <a:ext uri="{FF2B5EF4-FFF2-40B4-BE49-F238E27FC236}">
-                <a16:creationId xmlns:a16="http://schemas.microsoft.com/office/drawing/2014/main" id="{6AAA1F73-6144-44E3-86DD-6AB2AAFF314D}"/>
+                <a16:creationId xmlns:a16="http://schemas.microsoft.com/office/drawing/2014/main" id="{62CEC2E7-267A-43D3-AF58-91C864E224F9}"/>
               </a:ext>
             </a:extLst>
           </p:cNvPr>
@@ -11256,7 +11264,7 @@
           <p:cNvPr id="7" name="">
             <a:extLst xmlns:a="http://schemas.openxmlformats.org/drawingml/2006/main">
               <a:ext uri="{FF2B5EF4-FFF2-40B4-BE49-F238E27FC236}">
-                <a16:creationId xmlns:a16="http://schemas.microsoft.com/office/drawing/2014/main" id="{09A13101-9017-4929-B953-05E898F1CF6C}"/>
+                <a16:creationId xmlns:a16="http://schemas.microsoft.com/office/drawing/2014/main" id="{A7FB4636-D719-4D97-968F-A73EBDEF8E92}"/>
               </a:ext>
             </a:extLst>
           </p:cNvPr>
@@ -11288,7 +11296,7 @@
           <p:cNvPr id="8" name="">
             <a:extLst xmlns:a="http://schemas.openxmlformats.org/drawingml/2006/main">
               <a:ext uri="{FF2B5EF4-FFF2-40B4-BE49-F238E27FC236}">
-                <a16:creationId xmlns:a16="http://schemas.microsoft.com/office/drawing/2014/main" id="{D68F7763-9BF8-4A8F-A374-79ECC7B82115}"/>
+                <a16:creationId xmlns:a16="http://schemas.microsoft.com/office/drawing/2014/main" id="{643608FA-31E1-418B-9E98-A889A7695502}"/>
               </a:ext>
             </a:extLst>
           </p:cNvPr>
@@ -11345,7 +11353,7 @@
           <p:cNvPr id="9" name="">
             <a:extLst xmlns:a="http://schemas.openxmlformats.org/drawingml/2006/main">
               <a:ext uri="{FF2B5EF4-FFF2-40B4-BE49-F238E27FC236}">
-                <a16:creationId xmlns:a16="http://schemas.microsoft.com/office/drawing/2014/main" id="{C58AADAD-0363-420D-BD7E-0CC8DC49B0C7}"/>
+                <a16:creationId xmlns:a16="http://schemas.microsoft.com/office/drawing/2014/main" id="{1CF7A971-67BE-4CDB-8D8C-8DECC0817226}"/>
               </a:ext>
             </a:extLst>
           </p:cNvPr>
@@ -11406,7 +11414,7 @@
           <p:nvPr/>
         </p:nvPicPr>
         <p:blipFill>
-          <a:blip xmlns:r="http://schemas.openxmlformats.org/officeDocument/2006/relationships" xmlns:a="http://schemas.openxmlformats.org/drawingml/2006/main" r:embed="Rdb2dc4f64fe249ac"/>
+          <a:blip xmlns:r="http://schemas.openxmlformats.org/officeDocument/2006/relationships" xmlns:a="http://schemas.openxmlformats.org/drawingml/2006/main" r:embed="Raccecccc0cdf4c32"/>
           <a:stretch xmlns:a="http://schemas.openxmlformats.org/drawingml/2006/main"/>
         </p:blipFill>
         <p:spPr>
@@ -11424,7 +11432,7 @@
           <p:cNvPr id="11" name="">
             <a:extLst xmlns:a="http://schemas.openxmlformats.org/drawingml/2006/main">
               <a:ext uri="{FF2B5EF4-FFF2-40B4-BE49-F238E27FC236}">
-                <a16:creationId xmlns:a16="http://schemas.microsoft.com/office/drawing/2014/main" id="{AF412D74-0197-4693-8716-E0CFC5C57351}"/>
+                <a16:creationId xmlns:a16="http://schemas.microsoft.com/office/drawing/2014/main" id="{4D9BCECA-FB16-4612-B2F9-2FF2CFB3E83B}"/>
               </a:ext>
             </a:extLst>
           </p:cNvPr>
@@ -11481,7 +11489,7 @@
           <p:cNvPr id="12" name="">
             <a:extLst xmlns:a="http://schemas.openxmlformats.org/drawingml/2006/main">
               <a:ext uri="{FF2B5EF4-FFF2-40B4-BE49-F238E27FC236}">
-                <a16:creationId xmlns:a16="http://schemas.microsoft.com/office/drawing/2014/main" id="{9984855F-4760-4D07-86AA-28F006E5AB06}"/>
+                <a16:creationId xmlns:a16="http://schemas.microsoft.com/office/drawing/2014/main" id="{54E06400-183D-46B3-8232-ED12D675C4F7}"/>
               </a:ext>
             </a:extLst>
           </p:cNvPr>
@@ -11538,7 +11546,7 @@
           <p:cNvPr id="13" name="">
             <a:extLst xmlns:a="http://schemas.openxmlformats.org/drawingml/2006/main">
               <a:ext uri="{FF2B5EF4-FFF2-40B4-BE49-F238E27FC236}">
-                <a16:creationId xmlns:a16="http://schemas.microsoft.com/office/drawing/2014/main" id="{DE8E0E4C-314C-42DF-9113-469B3E773953}"/>
+                <a16:creationId xmlns:a16="http://schemas.microsoft.com/office/drawing/2014/main" id="{29F2C099-0613-40DD-9D71-A82BCB677B0D}"/>
               </a:ext>
             </a:extLst>
           </p:cNvPr>
@@ -11570,7 +11578,7 @@
           <p:cNvPr id="14" name="">
             <a:extLst xmlns:a="http://schemas.openxmlformats.org/drawingml/2006/main">
               <a:ext uri="{FF2B5EF4-FFF2-40B4-BE49-F238E27FC236}">
-                <a16:creationId xmlns:a16="http://schemas.microsoft.com/office/drawing/2014/main" id="{B106273B-1821-4A72-B331-90D0A0367769}"/>
+                <a16:creationId xmlns:a16="http://schemas.microsoft.com/office/drawing/2014/main" id="{D1FCCBB2-C0E8-4205-82E8-52FCDA8C5F6E}"/>
               </a:ext>
             </a:extLst>
           </p:cNvPr>
@@ -11627,7 +11635,7 @@
           <p:cNvPr id="15" name="">
             <a:extLst xmlns:a="http://schemas.openxmlformats.org/drawingml/2006/main">
               <a:ext uri="{FF2B5EF4-FFF2-40B4-BE49-F238E27FC236}">
-                <a16:creationId xmlns:a16="http://schemas.microsoft.com/office/drawing/2014/main" id="{78EE5CFD-4607-4C5D-BDC0-BB3942B3E565}"/>
+                <a16:creationId xmlns:a16="http://schemas.microsoft.com/office/drawing/2014/main" id="{586C2CE1-C375-403D-ABE6-1573D2838281}"/>
               </a:ext>
             </a:extLst>
           </p:cNvPr>
@@ -11682,7 +11690,7 @@
     </p:spTree>
     <p:extLst>
       <p:ext uri="{BB962C8B-B14F-4D97-AF65-F5344CB8AC3E}">
-        <p14:creationId xmlns:p14="http://schemas.microsoft.com/office/powerpoint/2010/main" val="102319210"/>
+        <p14:creationId xmlns:p14="http://schemas.microsoft.com/office/powerpoint/2010/main" val="793787456"/>
       </p:ext>
     </p:extLst>
   </p:cSld>
@@ -11837,7 +11845,7 @@
           <p:cNvPr id="23" name="">
             <a:extLst xmlns:a="http://schemas.openxmlformats.org/drawingml/2006/main">
               <a:ext uri="{FF2B5EF4-FFF2-40B4-BE49-F238E27FC236}">
-                <a16:creationId xmlns:a16="http://schemas.microsoft.com/office/drawing/2014/main" id="{2CF46B1D-D00E-4DC6-BA61-DFBEF6109259}"/>
+                <a16:creationId xmlns:a16="http://schemas.microsoft.com/office/drawing/2014/main" id="{69304305-BD70-4454-A322-622500241205}"/>
               </a:ext>
             </a:extLst>
           </p:cNvPr>
@@ -11869,7 +11877,7 @@
           <p:cNvPr id="2" name="">
             <a:extLst xmlns:a="http://schemas.openxmlformats.org/drawingml/2006/main">
               <a:ext uri="{FF2B5EF4-FFF2-40B4-BE49-F238E27FC236}">
-                <a16:creationId xmlns:a16="http://schemas.microsoft.com/office/drawing/2014/main" id="{89E496EA-64FF-4A77-BAF6-F4DDF95E1BEC}"/>
+                <a16:creationId xmlns:a16="http://schemas.microsoft.com/office/drawing/2014/main" id="{579C4A72-114B-4688-8552-2498004B0992}"/>
               </a:ext>
             </a:extLst>
           </p:cNvPr>
@@ -11926,7 +11934,7 @@
           <p:cNvPr id="3" name="">
             <a:extLst xmlns:a="http://schemas.openxmlformats.org/drawingml/2006/main">
               <a:ext uri="{FF2B5EF4-FFF2-40B4-BE49-F238E27FC236}">
-                <a16:creationId xmlns:a16="http://schemas.microsoft.com/office/drawing/2014/main" id="{BABF9540-D978-4A21-ACDB-7520964A20C6}"/>
+                <a16:creationId xmlns:a16="http://schemas.microsoft.com/office/drawing/2014/main" id="{55F1EA71-793D-44B9-BCB2-D794E9E1A01F}"/>
               </a:ext>
             </a:extLst>
           </p:cNvPr>
@@ -11958,7 +11966,7 @@
           <p:cNvPr id="4" name="">
             <a:extLst xmlns:a="http://schemas.openxmlformats.org/drawingml/2006/main">
               <a:ext uri="{FF2B5EF4-FFF2-40B4-BE49-F238E27FC236}">
-                <a16:creationId xmlns:a16="http://schemas.microsoft.com/office/drawing/2014/main" id="{60CBCAD0-99DB-4633-83C8-1FDC2B3D99F6}"/>
+                <a16:creationId xmlns:a16="http://schemas.microsoft.com/office/drawing/2014/main" id="{60AB8862-F501-40FE-AE24-EC688B3D144C}"/>
               </a:ext>
             </a:extLst>
           </p:cNvPr>
@@ -12015,7 +12023,7 @@
           <p:cNvPr id="5" name="">
             <a:extLst xmlns:a="http://schemas.openxmlformats.org/drawingml/2006/main">
               <a:ext uri="{FF2B5EF4-FFF2-40B4-BE49-F238E27FC236}">
-                <a16:creationId xmlns:a16="http://schemas.microsoft.com/office/drawing/2014/main" id="{C548FDAD-3CD1-4B1F-B0D4-B71135F50AA5}"/>
+                <a16:creationId xmlns:a16="http://schemas.microsoft.com/office/drawing/2014/main" id="{88FD2DAB-902E-4A58-A77A-1D1BEBFD2032}"/>
               </a:ext>
             </a:extLst>
           </p:cNvPr>
@@ -12072,7 +12080,7 @@
           <p:cNvPr id="6" name="">
             <a:extLst xmlns:a="http://schemas.openxmlformats.org/drawingml/2006/main">
               <a:ext uri="{FF2B5EF4-FFF2-40B4-BE49-F238E27FC236}">
-                <a16:creationId xmlns:a16="http://schemas.microsoft.com/office/drawing/2014/main" id="{E497428A-8BE9-498F-BB1C-63F8BCC4E679}"/>
+                <a16:creationId xmlns:a16="http://schemas.microsoft.com/office/drawing/2014/main" id="{4A53D482-AF8C-4E66-A487-F18DE0B6D276}"/>
               </a:ext>
             </a:extLst>
           </p:cNvPr>
@@ -12129,7 +12137,7 @@
           <p:cNvPr id="7" name="">
             <a:extLst xmlns:a="http://schemas.openxmlformats.org/drawingml/2006/main">
               <a:ext uri="{FF2B5EF4-FFF2-40B4-BE49-F238E27FC236}">
-                <a16:creationId xmlns:a16="http://schemas.microsoft.com/office/drawing/2014/main" id="{BC715258-C02C-47E3-BC6D-A679B134466C}"/>
+                <a16:creationId xmlns:a16="http://schemas.microsoft.com/office/drawing/2014/main" id="{A09D9413-4CCB-454B-978C-52A3CD68EF9D}"/>
               </a:ext>
             </a:extLst>
           </p:cNvPr>
@@ -12161,7 +12169,7 @@
           <p:cNvPr id="8" name="">
             <a:extLst xmlns:a="http://schemas.openxmlformats.org/drawingml/2006/main">
               <a:ext uri="{FF2B5EF4-FFF2-40B4-BE49-F238E27FC236}">
-                <a16:creationId xmlns:a16="http://schemas.microsoft.com/office/drawing/2014/main" id="{8F8485DA-28B9-45D9-A3EF-16654644E1EF}"/>
+                <a16:creationId xmlns:a16="http://schemas.microsoft.com/office/drawing/2014/main" id="{B23A56B1-DC54-4008-A9C7-A1DF473C6171}"/>
               </a:ext>
             </a:extLst>
           </p:cNvPr>
@@ -12218,7 +12226,7 @@
           <p:cNvPr id="9" name="">
             <a:extLst xmlns:a="http://schemas.openxmlformats.org/drawingml/2006/main">
               <a:ext uri="{FF2B5EF4-FFF2-40B4-BE49-F238E27FC236}">
-                <a16:creationId xmlns:a16="http://schemas.microsoft.com/office/drawing/2014/main" id="{53D1FF07-1E35-42DE-9F5A-C52AB5C274EB}"/>
+                <a16:creationId xmlns:a16="http://schemas.microsoft.com/office/drawing/2014/main" id="{A7F518A6-F0DC-4E1C-9F12-5270CE271831}"/>
               </a:ext>
             </a:extLst>
           </p:cNvPr>
@@ -12275,7 +12283,7 @@
           <p:cNvPr id="10" name="">
             <a:extLst xmlns:a="http://schemas.openxmlformats.org/drawingml/2006/main">
               <a:ext uri="{FF2B5EF4-FFF2-40B4-BE49-F238E27FC236}">
-                <a16:creationId xmlns:a16="http://schemas.microsoft.com/office/drawing/2014/main" id="{4D269180-17B7-4257-B929-AB5F1043CECF}"/>
+                <a16:creationId xmlns:a16="http://schemas.microsoft.com/office/drawing/2014/main" id="{D22ABF23-55E8-40C2-A4B8-4827586CA719}"/>
               </a:ext>
             </a:extLst>
           </p:cNvPr>
@@ -12309,7 +12317,7 @@
           <p:cNvPr id="11" name="">
             <a:extLst xmlns:a="http://schemas.openxmlformats.org/drawingml/2006/main">
               <a:ext uri="{FF2B5EF4-FFF2-40B4-BE49-F238E27FC236}">
-                <a16:creationId xmlns:a16="http://schemas.microsoft.com/office/drawing/2014/main" id="{CBE10F94-8513-44C0-8235-EAC6004E430F}"/>
+                <a16:creationId xmlns:a16="http://schemas.microsoft.com/office/drawing/2014/main" id="{46E1B671-84A1-4C04-A212-A1A9D5A392BE}"/>
               </a:ext>
             </a:extLst>
           </p:cNvPr>
@@ -12341,7 +12349,7 @@
           <p:cNvPr id="12" name="">
             <a:extLst xmlns:a="http://schemas.openxmlformats.org/drawingml/2006/main">
               <a:ext uri="{FF2B5EF4-FFF2-40B4-BE49-F238E27FC236}">
-                <a16:creationId xmlns:a16="http://schemas.microsoft.com/office/drawing/2014/main" id="{BAA6AD17-F60A-407E-B093-8AF69DD3EC56}"/>
+                <a16:creationId xmlns:a16="http://schemas.microsoft.com/office/drawing/2014/main" id="{BBF816BA-F93A-4B64-AF73-EA97AB6FB662}"/>
               </a:ext>
             </a:extLst>
           </p:cNvPr>
@@ -12398,7 +12406,7 @@
           <p:cNvPr id="13" name="">
             <a:extLst xmlns:a="http://schemas.openxmlformats.org/drawingml/2006/main">
               <a:ext uri="{FF2B5EF4-FFF2-40B4-BE49-F238E27FC236}">
-                <a16:creationId xmlns:a16="http://schemas.microsoft.com/office/drawing/2014/main" id="{A9FFA873-1157-44DC-A32D-CF573A538C28}"/>
+                <a16:creationId xmlns:a16="http://schemas.microsoft.com/office/drawing/2014/main" id="{E533457A-8B8D-4256-944F-8BD7FA5A9D2A}"/>
               </a:ext>
             </a:extLst>
           </p:cNvPr>
@@ -12455,7 +12463,7 @@
           <p:cNvPr id="14" name="">
             <a:extLst xmlns:a="http://schemas.openxmlformats.org/drawingml/2006/main">
               <a:ext uri="{FF2B5EF4-FFF2-40B4-BE49-F238E27FC236}">
-                <a16:creationId xmlns:a16="http://schemas.microsoft.com/office/drawing/2014/main" id="{42909E7D-F2E4-47B9-93B0-70BF25BAB5C4}"/>
+                <a16:creationId xmlns:a16="http://schemas.microsoft.com/office/drawing/2014/main" id="{86904B63-B70C-4F20-A891-74C5D1F420E6}"/>
               </a:ext>
             </a:extLst>
           </p:cNvPr>
@@ -12489,7 +12497,7 @@
           <p:cNvPr id="15" name="">
             <a:extLst xmlns:a="http://schemas.openxmlformats.org/drawingml/2006/main">
               <a:ext uri="{FF2B5EF4-FFF2-40B4-BE49-F238E27FC236}">
-                <a16:creationId xmlns:a16="http://schemas.microsoft.com/office/drawing/2014/main" id="{34D2BA8F-2C68-4B23-A5A4-7283ADBFF47D}"/>
+                <a16:creationId xmlns:a16="http://schemas.microsoft.com/office/drawing/2014/main" id="{11942649-00B1-495D-A701-6E523641BA1E}"/>
               </a:ext>
             </a:extLst>
           </p:cNvPr>
@@ -12521,7 +12529,7 @@
           <p:cNvPr id="16" name="">
             <a:extLst xmlns:a="http://schemas.openxmlformats.org/drawingml/2006/main">
               <a:ext uri="{FF2B5EF4-FFF2-40B4-BE49-F238E27FC236}">
-                <a16:creationId xmlns:a16="http://schemas.microsoft.com/office/drawing/2014/main" id="{295F375E-2CD4-4AE4-B702-87E23F65BC9E}"/>
+                <a16:creationId xmlns:a16="http://schemas.microsoft.com/office/drawing/2014/main" id="{BB23E46A-0104-4FB3-8263-9D3BEBD5286F}"/>
               </a:ext>
             </a:extLst>
           </p:cNvPr>
@@ -12578,7 +12586,7 @@
           <p:cNvPr id="17" name="">
             <a:extLst xmlns:a="http://schemas.openxmlformats.org/drawingml/2006/main">
               <a:ext uri="{FF2B5EF4-FFF2-40B4-BE49-F238E27FC236}">
-                <a16:creationId xmlns:a16="http://schemas.microsoft.com/office/drawing/2014/main" id="{4B6BF3D0-B586-4867-821F-F7743CA2BC93}"/>
+                <a16:creationId xmlns:a16="http://schemas.microsoft.com/office/drawing/2014/main" id="{A38FD7B1-72C5-476F-93B7-82FF89CE2E27}"/>
               </a:ext>
             </a:extLst>
           </p:cNvPr>
@@ -12635,7 +12643,7 @@
           <p:cNvPr id="18" name="">
             <a:extLst xmlns:a="http://schemas.openxmlformats.org/drawingml/2006/main">
               <a:ext uri="{FF2B5EF4-FFF2-40B4-BE49-F238E27FC236}">
-                <a16:creationId xmlns:a16="http://schemas.microsoft.com/office/drawing/2014/main" id="{66DBB445-21D5-4A79-82E5-8A9DB03922DB}"/>
+                <a16:creationId xmlns:a16="http://schemas.microsoft.com/office/drawing/2014/main" id="{391E7402-F89B-4F4F-886B-60BE169E2229}"/>
               </a:ext>
             </a:extLst>
           </p:cNvPr>
@@ -12669,7 +12677,7 @@
           <p:cNvPr id="19" name="">
             <a:extLst xmlns:a="http://schemas.openxmlformats.org/drawingml/2006/main">
               <a:ext uri="{FF2B5EF4-FFF2-40B4-BE49-F238E27FC236}">
-                <a16:creationId xmlns:a16="http://schemas.microsoft.com/office/drawing/2014/main" id="{D684C704-E1B8-40F8-8E29-C59DFA94021A}"/>
+                <a16:creationId xmlns:a16="http://schemas.microsoft.com/office/drawing/2014/main" id="{0136E29A-18CE-4B41-83CA-E27D3CFBB3D3}"/>
               </a:ext>
             </a:extLst>
           </p:cNvPr>
@@ -12701,7 +12709,7 @@
           <p:cNvPr id="20" name="">
             <a:extLst xmlns:a="http://schemas.openxmlformats.org/drawingml/2006/main">
               <a:ext uri="{FF2B5EF4-FFF2-40B4-BE49-F238E27FC236}">
-                <a16:creationId xmlns:a16="http://schemas.microsoft.com/office/drawing/2014/main" id="{C8808254-0423-4378-8FC4-EB4EFE79A59D}"/>
+                <a16:creationId xmlns:a16="http://schemas.microsoft.com/office/drawing/2014/main" id="{EFB5F1E1-77D3-48A3-ABD9-4B3CB4DC556A}"/>
               </a:ext>
             </a:extLst>
           </p:cNvPr>
@@ -12758,7 +12766,7 @@
           <p:cNvPr id="21" name="">
             <a:extLst xmlns:a="http://schemas.openxmlformats.org/drawingml/2006/main">
               <a:ext uri="{FF2B5EF4-FFF2-40B4-BE49-F238E27FC236}">
-                <a16:creationId xmlns:a16="http://schemas.microsoft.com/office/drawing/2014/main" id="{BA63FF0A-1B02-4128-9BCC-D3030D970B54}"/>
+                <a16:creationId xmlns:a16="http://schemas.microsoft.com/office/drawing/2014/main" id="{58E07AF0-257C-46AA-A633-1B073CC8A848}"/>
               </a:ext>
             </a:extLst>
           </p:cNvPr>
@@ -12815,7 +12823,7 @@
           <p:cNvPr id="22" name="">
             <a:extLst xmlns:a="http://schemas.openxmlformats.org/drawingml/2006/main">
               <a:ext uri="{FF2B5EF4-FFF2-40B4-BE49-F238E27FC236}">
-                <a16:creationId xmlns:a16="http://schemas.microsoft.com/office/drawing/2014/main" id="{B3FB732C-3E9D-4A85-9A77-6B487D63AD6C}"/>
+                <a16:creationId xmlns:a16="http://schemas.microsoft.com/office/drawing/2014/main" id="{0C9679F1-4468-4F36-8DDB-E2CD98331835}"/>
               </a:ext>
             </a:extLst>
           </p:cNvPr>
@@ -12870,7 +12878,7 @@
     </p:spTree>
     <p:extLst>
       <p:ext uri="{BB962C8B-B14F-4D97-AF65-F5344CB8AC3E}">
-        <p14:creationId xmlns:p14="http://schemas.microsoft.com/office/powerpoint/2010/main" val="1120935652"/>
+        <p14:creationId xmlns:p14="http://schemas.microsoft.com/office/powerpoint/2010/main" val="1751353368"/>
       </p:ext>
     </p:extLst>
   </p:cSld>
@@ -13071,7 +13079,7 @@
           <p:cNvPr id="22" name="">
             <a:extLst xmlns:a="http://schemas.openxmlformats.org/drawingml/2006/main">
               <a:ext uri="{FF2B5EF4-FFF2-40B4-BE49-F238E27FC236}">
-                <a16:creationId xmlns:a16="http://schemas.microsoft.com/office/drawing/2014/main" id="{DA22C049-FB25-480F-81F2-C97415183029}"/>
+                <a16:creationId xmlns:a16="http://schemas.microsoft.com/office/drawing/2014/main" id="{F810581E-60F4-4BC2-95AE-F56A9540CFA8}"/>
               </a:ext>
             </a:extLst>
           </p:cNvPr>
@@ -13103,7 +13111,7 @@
           <p:cNvPr id="2" name="">
             <a:extLst xmlns:a="http://schemas.openxmlformats.org/drawingml/2006/main">
               <a:ext uri="{FF2B5EF4-FFF2-40B4-BE49-F238E27FC236}">
-                <a16:creationId xmlns:a16="http://schemas.microsoft.com/office/drawing/2014/main" id="{DE725EFA-778D-40F6-A772-A7EC65BD4DB2}"/>
+                <a16:creationId xmlns:a16="http://schemas.microsoft.com/office/drawing/2014/main" id="{09774136-497D-4C3D-BCA5-5573430B732C}"/>
               </a:ext>
             </a:extLst>
           </p:cNvPr>
@@ -13160,7 +13168,7 @@
           <p:cNvPr id="3" name="">
             <a:extLst xmlns:a="http://schemas.openxmlformats.org/drawingml/2006/main">
               <a:ext uri="{FF2B5EF4-FFF2-40B4-BE49-F238E27FC236}">
-                <a16:creationId xmlns:a16="http://schemas.microsoft.com/office/drawing/2014/main" id="{49F9AE95-2132-47C1-9869-6FF58EBB0595}"/>
+                <a16:creationId xmlns:a16="http://schemas.microsoft.com/office/drawing/2014/main" id="{1E2F0977-1E8D-4B9A-BA58-6D74DE85CBAD}"/>
               </a:ext>
             </a:extLst>
           </p:cNvPr>
@@ -13192,7 +13200,7 @@
           <p:cNvPr id="4" name="">
             <a:extLst xmlns:a="http://schemas.openxmlformats.org/drawingml/2006/main">
               <a:ext uri="{FF2B5EF4-FFF2-40B4-BE49-F238E27FC236}">
-                <a16:creationId xmlns:a16="http://schemas.microsoft.com/office/drawing/2014/main" id="{13C9A853-B007-4C87-91F3-402D854F0B5A}"/>
+                <a16:creationId xmlns:a16="http://schemas.microsoft.com/office/drawing/2014/main" id="{80B0C862-E7AE-4F3F-88D1-4A06BCED8E32}"/>
               </a:ext>
             </a:extLst>
           </p:cNvPr>
@@ -13249,7 +13257,7 @@
           <p:cNvPr id="5" name="">
             <a:extLst xmlns:a="http://schemas.openxmlformats.org/drawingml/2006/main">
               <a:ext uri="{FF2B5EF4-FFF2-40B4-BE49-F238E27FC236}">
-                <a16:creationId xmlns:a16="http://schemas.microsoft.com/office/drawing/2014/main" id="{8A22F30B-BB94-4227-9E0A-B2D8513EF50A}"/>
+                <a16:creationId xmlns:a16="http://schemas.microsoft.com/office/drawing/2014/main" id="{63AA4C99-6CB2-4D3A-8B34-6784EF3C8E2D}"/>
               </a:ext>
             </a:extLst>
           </p:cNvPr>
@@ -13306,7 +13314,7 @@
           <p:cNvPr id="6" name="">
             <a:extLst xmlns:a="http://schemas.openxmlformats.org/drawingml/2006/main">
               <a:ext uri="{FF2B5EF4-FFF2-40B4-BE49-F238E27FC236}">
-                <a16:creationId xmlns:a16="http://schemas.microsoft.com/office/drawing/2014/main" id="{4D9EEDC6-F08F-4482-A47E-BADA10E3EB86}"/>
+                <a16:creationId xmlns:a16="http://schemas.microsoft.com/office/drawing/2014/main" id="{7A663B4E-D5E0-4A04-98D3-7F59787DB133}"/>
               </a:ext>
             </a:extLst>
           </p:cNvPr>
@@ -13363,7 +13371,7 @@
           <p:cNvPr id="7" name="">
             <a:extLst xmlns:a="http://schemas.openxmlformats.org/drawingml/2006/main">
               <a:ext uri="{FF2B5EF4-FFF2-40B4-BE49-F238E27FC236}">
-                <a16:creationId xmlns:a16="http://schemas.microsoft.com/office/drawing/2014/main" id="{E8AF48F9-0C1A-46B6-ADE6-807ADFA183AD}"/>
+                <a16:creationId xmlns:a16="http://schemas.microsoft.com/office/drawing/2014/main" id="{26A50653-2CBE-42CC-88E5-DD0153184D0A}"/>
               </a:ext>
             </a:extLst>
           </p:cNvPr>
@@ -13395,7 +13403,7 @@
           <p:cNvPr id="8" name="">
             <a:extLst xmlns:a="http://schemas.openxmlformats.org/drawingml/2006/main">
               <a:ext uri="{FF2B5EF4-FFF2-40B4-BE49-F238E27FC236}">
-                <a16:creationId xmlns:a16="http://schemas.microsoft.com/office/drawing/2014/main" id="{4FEE9E4F-2710-4809-B28A-A9151CF55668}"/>
+                <a16:creationId xmlns:a16="http://schemas.microsoft.com/office/drawing/2014/main" id="{3958E69C-8A1C-4AA2-9A61-77BDA76BD3C0}"/>
               </a:ext>
             </a:extLst>
           </p:cNvPr>
@@ -13452,7 +13460,7 @@
           <p:cNvPr id="9" name="">
             <a:extLst xmlns:a="http://schemas.openxmlformats.org/drawingml/2006/main">
               <a:ext uri="{FF2B5EF4-FFF2-40B4-BE49-F238E27FC236}">
-                <a16:creationId xmlns:a16="http://schemas.microsoft.com/office/drawing/2014/main" id="{79C3B7D8-4475-42B3-AC28-772A7D24A555}"/>
+                <a16:creationId xmlns:a16="http://schemas.microsoft.com/office/drawing/2014/main" id="{40E7517D-5735-4911-BA5C-93ED17436902}"/>
               </a:ext>
             </a:extLst>
           </p:cNvPr>
@@ -13509,7 +13517,7 @@
           <p:cNvPr id="10" name="">
             <a:extLst xmlns:a="http://schemas.openxmlformats.org/drawingml/2006/main">
               <a:ext uri="{FF2B5EF4-FFF2-40B4-BE49-F238E27FC236}">
-                <a16:creationId xmlns:a16="http://schemas.microsoft.com/office/drawing/2014/main" id="{6A40A37B-F433-4F75-BE30-2303B03AA71F}"/>
+                <a16:creationId xmlns:a16="http://schemas.microsoft.com/office/drawing/2014/main" id="{D905001B-78FA-40FA-9B2A-7A3C77A98F71}"/>
               </a:ext>
             </a:extLst>
           </p:cNvPr>
@@ -13543,7 +13551,7 @@
           <p:cNvPr id="11" name="">
             <a:extLst xmlns:a="http://schemas.openxmlformats.org/drawingml/2006/main">
               <a:ext uri="{FF2B5EF4-FFF2-40B4-BE49-F238E27FC236}">
-                <a16:creationId xmlns:a16="http://schemas.microsoft.com/office/drawing/2014/main" id="{D957848E-7C00-4AC2-A4BC-E97AFBE6F984}"/>
+                <a16:creationId xmlns:a16="http://schemas.microsoft.com/office/drawing/2014/main" id="{9309AF98-C88D-48A1-A460-FDFEE61556B0}"/>
               </a:ext>
             </a:extLst>
           </p:cNvPr>
@@ -13575,7 +13583,7 @@
           <p:cNvPr id="12" name="">
             <a:extLst xmlns:a="http://schemas.openxmlformats.org/drawingml/2006/main">
               <a:ext uri="{FF2B5EF4-FFF2-40B4-BE49-F238E27FC236}">
-                <a16:creationId xmlns:a16="http://schemas.microsoft.com/office/drawing/2014/main" id="{857B6621-67B4-4894-BE27-EA03390F5F48}"/>
+                <a16:creationId xmlns:a16="http://schemas.microsoft.com/office/drawing/2014/main" id="{CC2239A8-2D0C-42D3-BE33-C3A5E45908BE}"/>
               </a:ext>
             </a:extLst>
           </p:cNvPr>
@@ -13632,7 +13640,7 @@
           <p:cNvPr id="13" name="">
             <a:extLst xmlns:a="http://schemas.openxmlformats.org/drawingml/2006/main">
               <a:ext uri="{FF2B5EF4-FFF2-40B4-BE49-F238E27FC236}">
-                <a16:creationId xmlns:a16="http://schemas.microsoft.com/office/drawing/2014/main" id="{FD458967-72EE-4F68-8DC2-C9F0AB0BBBF8}"/>
+                <a16:creationId xmlns:a16="http://schemas.microsoft.com/office/drawing/2014/main" id="{83A1CF59-CAB8-42E9-A3CC-DB8223CB6537}"/>
               </a:ext>
             </a:extLst>
           </p:cNvPr>
@@ -13689,7 +13697,7 @@
           <p:cNvPr id="14" name="">
             <a:extLst xmlns:a="http://schemas.openxmlformats.org/drawingml/2006/main">
               <a:ext uri="{FF2B5EF4-FFF2-40B4-BE49-F238E27FC236}">
-                <a16:creationId xmlns:a16="http://schemas.microsoft.com/office/drawing/2014/main" id="{C8648F48-72B7-483B-A017-B7065ADBEAC0}"/>
+                <a16:creationId xmlns:a16="http://schemas.microsoft.com/office/drawing/2014/main" id="{666E4209-0E20-4F45-9545-23285DBEEB78}"/>
               </a:ext>
             </a:extLst>
           </p:cNvPr>
@@ -13723,7 +13731,7 @@
           <p:cNvPr id="15" name="">
             <a:extLst xmlns:a="http://schemas.openxmlformats.org/drawingml/2006/main">
               <a:ext uri="{FF2B5EF4-FFF2-40B4-BE49-F238E27FC236}">
-                <a16:creationId xmlns:a16="http://schemas.microsoft.com/office/drawing/2014/main" id="{B8F687A1-1E60-43B1-9164-6B8E16BB3077}"/>
+                <a16:creationId xmlns:a16="http://schemas.microsoft.com/office/drawing/2014/main" id="{88314229-CD1A-4281-8B71-8CB100E31B28}"/>
               </a:ext>
             </a:extLst>
           </p:cNvPr>
@@ -13755,7 +13763,7 @@
           <p:cNvPr id="16" name="">
             <a:extLst xmlns:a="http://schemas.openxmlformats.org/drawingml/2006/main">
               <a:ext uri="{FF2B5EF4-FFF2-40B4-BE49-F238E27FC236}">
-                <a16:creationId xmlns:a16="http://schemas.microsoft.com/office/drawing/2014/main" id="{35C00DDE-27B5-46ED-B3F0-5F5F5721DB57}"/>
+                <a16:creationId xmlns:a16="http://schemas.microsoft.com/office/drawing/2014/main" id="{936F3880-83F4-4B07-8F49-8D87B6C9C6C1}"/>
               </a:ext>
             </a:extLst>
           </p:cNvPr>
@@ -13812,7 +13820,7 @@
           <p:cNvPr id="17" name="">
             <a:extLst xmlns:a="http://schemas.openxmlformats.org/drawingml/2006/main">
               <a:ext uri="{FF2B5EF4-FFF2-40B4-BE49-F238E27FC236}">
-                <a16:creationId xmlns:a16="http://schemas.microsoft.com/office/drawing/2014/main" id="{5A30B0B1-35C8-4EEA-89C8-E9E02E8F7ADB}"/>
+                <a16:creationId xmlns:a16="http://schemas.microsoft.com/office/drawing/2014/main" id="{CB08D7E4-010A-401C-9565-E573AE6C21F5}"/>
               </a:ext>
             </a:extLst>
           </p:cNvPr>
@@ -13869,7 +13877,7 @@
           <p:cNvPr id="18" name="">
             <a:extLst xmlns:a="http://schemas.openxmlformats.org/drawingml/2006/main">
               <a:ext uri="{FF2B5EF4-FFF2-40B4-BE49-F238E27FC236}">
-                <a16:creationId xmlns:a16="http://schemas.microsoft.com/office/drawing/2014/main" id="{530DEBA8-797C-46EF-8EDA-863E7E8F0C4D}"/>
+                <a16:creationId xmlns:a16="http://schemas.microsoft.com/office/drawing/2014/main" id="{2B6ED3DE-B636-471D-BDF5-5042EFD25DB6}"/>
               </a:ext>
             </a:extLst>
           </p:cNvPr>
@@ -13903,7 +13911,7 @@
           <p:cNvPr id="19" name="">
             <a:extLst xmlns:a="http://schemas.openxmlformats.org/drawingml/2006/main">
               <a:ext uri="{FF2B5EF4-FFF2-40B4-BE49-F238E27FC236}">
-                <a16:creationId xmlns:a16="http://schemas.microsoft.com/office/drawing/2014/main" id="{58D6B36F-CD33-40A2-9D6C-A59BC13E5E39}"/>
+                <a16:creationId xmlns:a16="http://schemas.microsoft.com/office/drawing/2014/main" id="{C14CD2C5-2E1D-4FA5-957C-8BEEC203CC17}"/>
               </a:ext>
             </a:extLst>
           </p:cNvPr>
@@ -13935,7 +13943,7 @@
           <p:cNvPr id="20" name="">
             <a:extLst xmlns:a="http://schemas.openxmlformats.org/drawingml/2006/main">
               <a:ext uri="{FF2B5EF4-FFF2-40B4-BE49-F238E27FC236}">
-                <a16:creationId xmlns:a16="http://schemas.microsoft.com/office/drawing/2014/main" id="{E9AB9797-4DB2-4ABF-9DD0-B1B245B589A9}"/>
+                <a16:creationId xmlns:a16="http://schemas.microsoft.com/office/drawing/2014/main" id="{92B038EE-09AD-4C0E-86C6-647D8EA5F2C7}"/>
               </a:ext>
             </a:extLst>
           </p:cNvPr>
@@ -13992,7 +14000,7 @@
           <p:cNvPr id="21" name="">
             <a:extLst xmlns:a="http://schemas.openxmlformats.org/drawingml/2006/main">
               <a:ext uri="{FF2B5EF4-FFF2-40B4-BE49-F238E27FC236}">
-                <a16:creationId xmlns:a16="http://schemas.microsoft.com/office/drawing/2014/main" id="{4EF4C031-65C7-4F2C-B1EE-1E117F24D2A5}"/>
+                <a16:creationId xmlns:a16="http://schemas.microsoft.com/office/drawing/2014/main" id="{C4AD7160-69FA-471E-B8AB-DF5817DB7867}"/>
               </a:ext>
             </a:extLst>
           </p:cNvPr>
@@ -14047,7 +14055,7 @@
     </p:spTree>
     <p:extLst>
       <p:ext uri="{BB962C8B-B14F-4D97-AF65-F5344CB8AC3E}">
-        <p14:creationId xmlns:p14="http://schemas.microsoft.com/office/powerpoint/2010/main" val="2123571827"/>
+        <p14:creationId xmlns:p14="http://schemas.microsoft.com/office/powerpoint/2010/main" val="636701637"/>
       </p:ext>
     </p:extLst>
   </p:cSld>
